--- a/SeaWatch-Capabilities-Brief.pptx
+++ b/SeaWatch-Capabilities-Brief.pptx
@@ -4,6 +4,9 @@
   <p:sldMasterIdLst>
     <p:sldMasterId id="2147483648" r:id="rId1"/>
   </p:sldMasterIdLst>
+  <p:notesMasterIdLst>
+    <p:notesMasterId r:id="rId18"/>
+  </p:notesMasterIdLst>
   <p:sldIdLst>
     <p:sldId id="256" r:id="rId2"/>
     <p:sldId id="257" r:id="rId3"/>
@@ -22,11 +25,8 @@
     <p:sldId id="270" r:id="rId16"/>
     <p:sldId id="271" r:id="rId17"/>
   </p:sldIdLst>
-  <p:notesMasterIdLst>
-    <p:notesMasterId r:id="rId18"/>
-  </p:notesMasterIdLst>
-  <p:sldSz cx="12191695" cy="6858000"/>
-  <p:notesSz cx="6858000" cy="12191695"/>
+  <p:sldSz cx="12192000" cy="6858000"/>
+  <p:notesSz cx="6858000" cy="12192000"/>
   <p:defaultTextStyle>
     <a:lvl1pPr marL="0" algn="l" defTabSz="914400" rtl="0" eaLnBrk="1" latinLnBrk="0" hangingPunct="1">
       <a:defRPr sz="1800" kern="1200">
@@ -119,6 +119,11 @@
       </a:defRPr>
     </a:lvl9pPr>
   </p:defaultTextStyle>
+  <p:extLst>
+    <p:ext uri="{EFAFB233-063F-42B5-8137-9DF3F51BA10A}">
+      <p15:sldGuideLst xmlns:p15="http://schemas.microsoft.com/office/powerpoint/2012/main"/>
+    </p:ext>
+  </p:extLst>
 </p:presentation>
 </file>
 
@@ -144,234 +149,10 @@
           <a:chExt cx="0" cy="0"/>
         </a:xfrm>
       </p:grpSpPr>
-      <p:sp>
-        <p:nvSpPr>
-          <p:cNvPr id="2" name="Header Placeholder 1"/>
-          <p:cNvSpPr>
-            <a:spLocks noGrp="1"/>
-          </p:cNvSpPr>
-          <p:nvPr>
-            <p:ph type="hdr" sz="quarter"/>
-          </p:nvPr>
-        </p:nvSpPr>
-        <p:spPr>
-          <a:xfrm>
-            <a:off x="0" y="0"/>
-            <a:ext cx="2971800" cy="458788"/>
-          </a:xfrm>
-          <a:prstGeom prst="rect">
-            <a:avLst/>
-          </a:prstGeom>
-        </p:spPr>
-        <p:txBody>
-          <a:bodyPr vert="horz" lIns="91440" tIns="45720" rIns="91440" bIns="45720" rtlCol="0"/>
-          <a:lstStyle>
-            <a:lvl1pPr algn="l">
-              <a:defRPr sz="1200"/>
-            </a:lvl1pPr>
-          </a:lstStyle>
-          <a:p>
-            <a:endParaRPr lang="en-US"/>
-          </a:p>
-        </p:txBody>
-      </p:sp>
-      <p:sp>
-        <p:nvSpPr>
-          <p:cNvPr id="3" name="Date Placeholder 2"/>
-          <p:cNvSpPr>
-            <a:spLocks noGrp="1"/>
-          </p:cNvSpPr>
-          <p:nvPr>
-            <p:ph type="dt" idx="1"/>
-          </p:nvPr>
-        </p:nvSpPr>
-        <p:spPr>
-          <a:xfrm>
-            <a:off x="3884613" y="0"/>
-            <a:ext cx="2971800" cy="458788"/>
-          </a:xfrm>
-          <a:prstGeom prst="rect">
-            <a:avLst/>
-          </a:prstGeom>
-        </p:spPr>
-        <p:txBody>
-          <a:bodyPr vert="horz" lIns="91440" tIns="45720" rIns="91440" bIns="45720" rtlCol="0"/>
-          <a:lstStyle>
-            <a:lvl1pPr algn="r">
-              <a:defRPr sz="1200"/>
-            </a:lvl1pPr>
-          </a:lstStyle>
-          <a:p>
-            <a:fld id="{5282F153-3F37-0F45-9E97-73ACFA13230C}" type="datetimeFigureOut">
-              <a:rPr lang="en-US"/>
-              <a:t>7/23/19</a:t>
-            </a:fld>
-            <a:endParaRPr lang="en-US"/>
-          </a:p>
-        </p:txBody>
-      </p:sp>
-      <p:sp>
-        <p:nvSpPr>
-          <p:cNvPr id="4" name="Slide Image Placeholder 3"/>
-          <p:cNvSpPr>
-            <a:spLocks noGrp="1" noRot="1" noChangeAspect="1"/>
-          </p:cNvSpPr>
-          <p:nvPr>
-            <p:ph type="sldImg" idx="2"/>
-          </p:nvPr>
-        </p:nvSpPr>
-        <p:spPr>
-          <a:xfrm>
-            <a:off x="685800" y="1143000"/>
-            <a:ext cx="5486400" cy="3086100"/>
-          </a:xfrm>
-          <a:prstGeom prst="rect">
-            <a:avLst/>
-          </a:prstGeom>
-          <a:noFill/>
-          <a:ln w="12700">
-            <a:solidFill>
-              <a:prstClr val="black"/>
-            </a:solidFill>
-          </a:ln>
-        </p:spPr>
-        <p:txBody>
-          <a:bodyPr vert="horz" lIns="91440" tIns="45720" rIns="91440" bIns="45720" rtlCol="0" anchor="ctr"/>
-          <a:lstStyle/>
-          <a:p>
-            <a:endParaRPr lang="en-US"/>
-          </a:p>
-        </p:txBody>
-      </p:sp>
-      <p:sp>
-        <p:nvSpPr>
-          <p:cNvPr id="5" name="Notes Placeholder 4"/>
-          <p:cNvSpPr>
-            <a:spLocks noGrp="1"/>
-          </p:cNvSpPr>
-          <p:nvPr>
-            <p:ph type="body" sz="quarter" idx="3"/>
-          </p:nvPr>
-        </p:nvSpPr>
-        <p:spPr>
-          <a:xfrm>
-            <a:off x="685800" y="4400550"/>
-            <a:ext cx="5486400" cy="3600450"/>
-          </a:xfrm>
-          <a:prstGeom prst="rect">
-            <a:avLst/>
-          </a:prstGeom>
-        </p:spPr>
-        <p:txBody>
-          <a:bodyPr vert="horz" lIns="91440" tIns="45720" rIns="91440" bIns="45720" rtlCol="0"/>
-          <a:lstStyle/>
-          <a:p>
-            <a:pPr lvl="0"/>
-            <a:r>
-              <a:rPr lang="en-US"/>
-              <a:t>Click to edit Master text styles</a:t>
-            </a:r>
-          </a:p>
-          <a:p>
-            <a:pPr lvl="1"/>
-            <a:r>
-              <a:rPr lang="en-US"/>
-              <a:t>Second level</a:t>
-            </a:r>
-          </a:p>
-          <a:p>
-            <a:pPr lvl="2"/>
-            <a:r>
-              <a:rPr lang="en-US"/>
-              <a:t>Third level</a:t>
-            </a:r>
-          </a:p>
-          <a:p>
-            <a:pPr lvl="3"/>
-            <a:r>
-              <a:rPr lang="en-US"/>
-              <a:t>Fourth level</a:t>
-            </a:r>
-          </a:p>
-          <a:p>
-            <a:pPr lvl="4"/>
-            <a:r>
-              <a:rPr lang="en-US"/>
-              <a:t>Fifth level</a:t>
-            </a:r>
-          </a:p>
-        </p:txBody>
-      </p:sp>
-      <p:sp>
-        <p:nvSpPr>
-          <p:cNvPr id="6" name="Footer Placeholder 5"/>
-          <p:cNvSpPr>
-            <a:spLocks noGrp="1"/>
-          </p:cNvSpPr>
-          <p:nvPr>
-            <p:ph type="ftr" sz="quarter" idx="4"/>
-          </p:nvPr>
-        </p:nvSpPr>
-        <p:spPr>
-          <a:xfrm>
-            <a:off x="0" y="8685213"/>
-            <a:ext cx="2971800" cy="458787"/>
-          </a:xfrm>
-          <a:prstGeom prst="rect">
-            <a:avLst/>
-          </a:prstGeom>
-        </p:spPr>
-        <p:txBody>
-          <a:bodyPr vert="horz" lIns="91440" tIns="45720" rIns="91440" bIns="45720" rtlCol="0" anchor="b"/>
-          <a:lstStyle>
-            <a:lvl1pPr algn="l">
-              <a:defRPr sz="1200"/>
-            </a:lvl1pPr>
-          </a:lstStyle>
-          <a:p>
-            <a:endParaRPr lang="en-US"/>
-          </a:p>
-        </p:txBody>
-      </p:sp>
-      <p:sp>
-        <p:nvSpPr>
-          <p:cNvPr id="7" name="Slide Number Placeholder 6"/>
-          <p:cNvSpPr>
-            <a:spLocks noGrp="1"/>
-          </p:cNvSpPr>
-          <p:nvPr>
-            <p:ph type="sldNum" sz="quarter" idx="5"/>
-          </p:nvPr>
-        </p:nvSpPr>
-        <p:spPr>
-          <a:xfrm>
-            <a:off x="3884613" y="8685213"/>
-            <a:ext cx="2971800" cy="458787"/>
-          </a:xfrm>
-          <a:prstGeom prst="rect">
-            <a:avLst/>
-          </a:prstGeom>
-        </p:spPr>
-        <p:txBody>
-          <a:bodyPr vert="horz" lIns="91440" tIns="45720" rIns="91440" bIns="45720" rtlCol="0" anchor="b"/>
-          <a:lstStyle>
-            <a:lvl1pPr algn="r">
-              <a:defRPr sz="1200"/>
-            </a:lvl1pPr>
-          </a:lstStyle>
-          <a:p>
-            <a:fld id="{CE5E9CC1-C706-0F49-92D6-E571CC5EEA8F}" type="slidenum">
-              <a:rPr lang="en-US"/>
-              <a:t>‹#›</a:t>
-            </a:fld>
-            <a:endParaRPr lang="en-US"/>
-          </a:p>
-        </p:txBody>
-      </p:sp>
     </p:spTree>
     <p:extLst>
       <p:ext uri="{BB962C8B-B14F-4D97-AF65-F5344CB8AC3E}">
-        <p14:creationId xmlns:p14="http://schemas.microsoft.com/office/powerpoint/2010/main" val="1024086991"/>
+        <p14:creationId xmlns:p14="http://schemas.microsoft.com/office/powerpoint/2010/main" val="3810836076"/>
       </p:ext>
     </p:extLst>
   </p:cSld>
@@ -515,10 +296,6 @@
           <a:bodyPr/>
           <a:lstStyle/>
           <a:p>
-            <a:r>
-              <a:rPr lang="en-US" dirty="0"/>
-              <a:t/>
-            </a:r>
             <a:endParaRPr lang="en-US" dirty="0"/>
           </a:p>
         </p:txBody>
@@ -603,10 +380,6 @@
           <a:bodyPr/>
           <a:lstStyle/>
           <a:p>
-            <a:r>
-              <a:rPr lang="en-US" dirty="0"/>
-              <a:t/>
-            </a:r>
             <a:endParaRPr lang="en-US" dirty="0"/>
           </a:p>
         </p:txBody>
@@ -691,10 +464,6 @@
           <a:bodyPr/>
           <a:lstStyle/>
           <a:p>
-            <a:r>
-              <a:rPr lang="en-US" dirty="0"/>
-              <a:t/>
-            </a:r>
             <a:endParaRPr lang="en-US" dirty="0"/>
           </a:p>
         </p:txBody>
@@ -779,10 +548,6 @@
           <a:bodyPr/>
           <a:lstStyle/>
           <a:p>
-            <a:r>
-              <a:rPr lang="en-US" dirty="0"/>
-              <a:t/>
-            </a:r>
             <a:endParaRPr lang="en-US" dirty="0"/>
           </a:p>
         </p:txBody>
@@ -867,10 +632,6 @@
           <a:bodyPr/>
           <a:lstStyle/>
           <a:p>
-            <a:r>
-              <a:rPr lang="en-US" dirty="0"/>
-              <a:t/>
-            </a:r>
             <a:endParaRPr lang="en-US" dirty="0"/>
           </a:p>
         </p:txBody>
@@ -955,10 +716,6 @@
           <a:bodyPr/>
           <a:lstStyle/>
           <a:p>
-            <a:r>
-              <a:rPr lang="en-US" dirty="0"/>
-              <a:t/>
-            </a:r>
             <a:endParaRPr lang="en-US" dirty="0"/>
           </a:p>
         </p:txBody>
@@ -1043,10 +800,6 @@
           <a:bodyPr/>
           <a:lstStyle/>
           <a:p>
-            <a:r>
-              <a:rPr lang="en-US" dirty="0"/>
-              <a:t/>
-            </a:r>
             <a:endParaRPr lang="en-US" dirty="0"/>
           </a:p>
         </p:txBody>
@@ -1131,10 +884,6 @@
           <a:bodyPr/>
           <a:lstStyle/>
           <a:p>
-            <a:r>
-              <a:rPr lang="en-US" dirty="0"/>
-              <a:t/>
-            </a:r>
             <a:endParaRPr lang="en-US" dirty="0"/>
           </a:p>
         </p:txBody>
@@ -1219,10 +968,6 @@
           <a:bodyPr/>
           <a:lstStyle/>
           <a:p>
-            <a:r>
-              <a:rPr lang="en-US" dirty="0"/>
-              <a:t/>
-            </a:r>
             <a:endParaRPr lang="en-US" dirty="0"/>
           </a:p>
         </p:txBody>
@@ -1307,10 +1052,6 @@
           <a:bodyPr/>
           <a:lstStyle/>
           <a:p>
-            <a:r>
-              <a:rPr lang="en-US" dirty="0"/>
-              <a:t/>
-            </a:r>
             <a:endParaRPr lang="en-US" dirty="0"/>
           </a:p>
         </p:txBody>
@@ -1395,10 +1136,6 @@
           <a:bodyPr/>
           <a:lstStyle/>
           <a:p>
-            <a:r>
-              <a:rPr lang="en-US" dirty="0"/>
-              <a:t/>
-            </a:r>
             <a:endParaRPr lang="en-US" dirty="0"/>
           </a:p>
         </p:txBody>
@@ -1483,10 +1220,6 @@
           <a:bodyPr/>
           <a:lstStyle/>
           <a:p>
-            <a:r>
-              <a:rPr lang="en-US" dirty="0"/>
-              <a:t/>
-            </a:r>
             <a:endParaRPr lang="en-US" dirty="0"/>
           </a:p>
         </p:txBody>
@@ -1571,10 +1304,6 @@
           <a:bodyPr/>
           <a:lstStyle/>
           <a:p>
-            <a:r>
-              <a:rPr lang="en-US" dirty="0"/>
-              <a:t/>
-            </a:r>
             <a:endParaRPr lang="en-US" dirty="0"/>
           </a:p>
         </p:txBody>
@@ -1659,10 +1388,6 @@
           <a:bodyPr/>
           <a:lstStyle/>
           <a:p>
-            <a:r>
-              <a:rPr lang="en-US" dirty="0"/>
-              <a:t/>
-            </a:r>
             <a:endParaRPr lang="en-US" dirty="0"/>
           </a:p>
         </p:txBody>
@@ -1747,10 +1472,6 @@
           <a:bodyPr/>
           <a:lstStyle/>
           <a:p>
-            <a:r>
-              <a:rPr lang="en-US" dirty="0"/>
-              <a:t/>
-            </a:r>
             <a:endParaRPr lang="en-US" dirty="0"/>
           </a:p>
         </p:txBody>
@@ -1835,10 +1556,6 @@
           <a:bodyPr/>
           <a:lstStyle/>
           <a:p>
-            <a:r>
-              <a:rPr lang="en-US" dirty="0"/>
-              <a:t/>
-            </a:r>
             <a:endParaRPr lang="en-US" dirty="0"/>
           </a:p>
         </p:txBody>
@@ -1912,6 +1629,11 @@
 <file path=ppt/slideMasters/slideMaster1.xml><?xml version="1.0" encoding="utf-8"?>
 <p:sldMaster xmlns:a="http://schemas.openxmlformats.org/drawingml/2006/main" xmlns:r="http://schemas.openxmlformats.org/officeDocument/2006/relationships" xmlns:p="http://schemas.openxmlformats.org/presentationml/2006/main">
   <p:cSld>
+    <p:bg>
+      <p:bgRef idx="1001">
+        <a:schemeClr val="bg1"/>
+      </p:bgRef>
+    </p:bg>
     <p:spTree>
       <p:nvGrpSpPr>
         <p:cNvPr id="1" name=""/>
@@ -2194,6 +1916,7 @@
         <a:solidFill>
           <a:srgbClr val="0A1A2E"/>
         </a:solidFill>
+        <a:effectLst/>
       </p:bgPr>
     </p:bg>
     <p:spTree>
@@ -2232,14 +1955,14 @@
       </p:sp>
       <p:pic>
         <p:nvPicPr>
-          <p:cNvPr id="3" name="Image 0" descr="crest.png">    </p:cNvPr>
+          <p:cNvPr id="3" name="Image 0" descr="crest.png"/>
           <p:cNvPicPr>
             <a:picLocks noChangeAspect="1"/>
           </p:cNvPicPr>
           <p:nvPr/>
         </p:nvPicPr>
         <p:blipFill>
-          <a:blip r:embed="rId1"/>
+          <a:blip r:embed="rId3"/>
           <a:stretch>
             <a:fillRect/>
           </a:stretch>
@@ -2275,7 +1998,7 @@
           <a:bodyPr wrap="square" lIns="0" tIns="0" rIns="0" bIns="0" rtlCol="0" anchor="ctr"/>
           <a:lstStyle/>
           <a:p>
-            <a:pPr indent="0" marL="0">
+            <a:pPr marL="0" indent="0">
               <a:buNone/>
             </a:pPr>
             <a:r>
@@ -2314,11 +2037,11 @@
           <a:bodyPr wrap="square" lIns="0" tIns="0" rIns="0" bIns="0" rtlCol="0" anchor="ctr"/>
           <a:lstStyle/>
           <a:p>
-            <a:pPr indent="0" marL="0">
-              <a:buNone/>
-            </a:pPr>
-            <a:r>
-              <a:rPr lang="en-US" sz="1500" b="1" spc="200" kern="0" dirty="0">
+            <a:pPr marL="0" indent="0">
+              <a:buNone/>
+            </a:pPr>
+            <a:r>
+              <a:rPr lang="en-US" sz="1500" b="1" kern="0" spc="200" dirty="0">
                 <a:solidFill>
                   <a:srgbClr val="F2C200"/>
                 </a:solidFill>
@@ -2376,7 +2099,7 @@
           <a:bodyPr wrap="square" lIns="0" tIns="0" rIns="0" bIns="0" rtlCol="0" anchor="ctr"/>
           <a:lstStyle/>
           <a:p>
-            <a:pPr indent="0" marL="0">
+            <a:pPr marL="0" indent="0">
               <a:buNone/>
             </a:pPr>
             <a:r>
@@ -2415,7 +2138,7 @@
           <a:bodyPr wrap="square" lIns="0" tIns="0" rIns="0" bIns="0" rtlCol="0" anchor="ctr"/>
           <a:lstStyle/>
           <a:p>
-            <a:pPr indent="0" marL="0">
+            <a:pPr marL="0" indent="0">
               <a:buNone/>
             </a:pPr>
             <a:r>
@@ -2476,7 +2199,7 @@
           <a:bodyPr wrap="square" lIns="0" tIns="0" rIns="0" bIns="0" rtlCol="0" anchor="ctr"/>
           <a:lstStyle/>
           <a:p>
-            <a:pPr algn="ctr" indent="0" marL="0">
+            <a:pPr marL="0" indent="0" algn="ctr">
               <a:buNone/>
             </a:pPr>
             <a:r>
@@ -2537,7 +2260,7 @@
           <a:bodyPr wrap="square" lIns="0" tIns="0" rIns="0" bIns="0" rtlCol="0" anchor="ctr"/>
           <a:lstStyle/>
           <a:p>
-            <a:pPr algn="ctr" indent="0" marL="0">
+            <a:pPr marL="0" indent="0" algn="ctr">
               <a:buNone/>
             </a:pPr>
             <a:r>
@@ -2598,7 +2321,7 @@
           <a:bodyPr wrap="square" lIns="0" tIns="0" rIns="0" bIns="0" rtlCol="0" anchor="ctr"/>
           <a:lstStyle/>
           <a:p>
-            <a:pPr algn="ctr" indent="0" marL="0">
+            <a:pPr marL="0" indent="0" algn="ctr">
               <a:buNone/>
             </a:pPr>
             <a:r>
@@ -2637,7 +2360,7 @@
           <a:bodyPr wrap="square" lIns="0" tIns="0" rIns="0" bIns="0" rtlCol="0" anchor="ctr"/>
           <a:lstStyle/>
           <a:p>
-            <a:pPr algn="r" indent="0" marL="0">
+            <a:pPr marL="0" indent="0" algn="r">
               <a:buNone/>
             </a:pPr>
             <a:r>
@@ -2654,7 +2377,7 @@
             <a:endParaRPr lang="en-US" sz="1150" dirty="0"/>
           </a:p>
           <a:p>
-            <a:pPr algn="r" indent="0" marL="0">
+            <a:pPr marL="0" indent="0" algn="r">
               <a:buNone/>
             </a:pPr>
             <a:r>
@@ -2688,6 +2411,7 @@
         <a:solidFill>
           <a:srgbClr val="FFFFFF"/>
         </a:solidFill>
+        <a:effectLst/>
       </p:bgPr>
     </p:bg>
     <p:spTree>
@@ -2725,11 +2449,11 @@
           <a:bodyPr wrap="square" lIns="0" tIns="0" rIns="0" bIns="0" rtlCol="0" anchor="ctr"/>
           <a:lstStyle/>
           <a:p>
-            <a:pPr indent="0" marL="0">
-              <a:buNone/>
-            </a:pPr>
-            <a:r>
-              <a:rPr lang="en-US" sz="1250" b="1" spc="200" kern="0" dirty="0">
+            <a:pPr marL="0" indent="0">
+              <a:buNone/>
+            </a:pPr>
+            <a:r>
+              <a:rPr lang="en-US" sz="1250" b="1" kern="0" spc="200" dirty="0">
                 <a:solidFill>
                   <a:srgbClr val="1B9E8A"/>
                 </a:solidFill>
@@ -2764,7 +2488,7 @@
           <a:bodyPr wrap="square" lIns="0" tIns="0" rIns="0" bIns="0" rtlCol="0" anchor="ctr"/>
           <a:lstStyle/>
           <a:p>
-            <a:pPr indent="0" marL="0">
+            <a:pPr marL="0" indent="0">
               <a:buNone/>
             </a:pPr>
             <a:r>
@@ -2803,7 +2527,7 @@
           </a:solidFill>
           <a:ln/>
           <a:effectLst>
-            <a:outerShdw sx="100000" sy="100000" kx="0" ky="0" algn="bl" rotWithShape="0" blurRad="101600" dist="38100" dir="5400000">
+            <a:outerShdw blurRad="101600" dist="38100" dir="5400000" algn="bl" rotWithShape="0">
               <a:srgbClr val="0A1626">
                 <a:alpha val="10000"/>
               </a:srgbClr>
@@ -2852,7 +2576,7 @@
           <a:bodyPr wrap="square" lIns="0" tIns="0" rIns="0" bIns="0" rtlCol="0" anchor="ctr"/>
           <a:lstStyle/>
           <a:p>
-            <a:pPr indent="0" marL="0">
+            <a:pPr marL="0" indent="0">
               <a:buNone/>
             </a:pPr>
             <a:r>
@@ -2891,7 +2615,7 @@
           <a:bodyPr wrap="square" lIns="0" tIns="0" rIns="0" bIns="0" rtlCol="0" anchor="t"/>
           <a:lstStyle/>
           <a:p>
-            <a:pPr indent="0" marL="0">
+            <a:pPr marL="0" indent="0">
               <a:buNone/>
             </a:pPr>
             <a:r>
@@ -2930,7 +2654,7 @@
           </a:solidFill>
           <a:ln/>
           <a:effectLst>
-            <a:outerShdw sx="100000" sy="100000" kx="0" ky="0" algn="bl" rotWithShape="0" blurRad="101600" dist="38100" dir="5400000">
+            <a:outerShdw blurRad="101600" dist="38100" dir="5400000" algn="bl" rotWithShape="0">
               <a:srgbClr val="0A1626">
                 <a:alpha val="10000"/>
               </a:srgbClr>
@@ -2979,7 +2703,7 @@
           <a:bodyPr wrap="square" lIns="0" tIns="0" rIns="0" bIns="0" rtlCol="0" anchor="ctr"/>
           <a:lstStyle/>
           <a:p>
-            <a:pPr indent="0" marL="0">
+            <a:pPr marL="0" indent="0">
               <a:buNone/>
             </a:pPr>
             <a:r>
@@ -3018,7 +2742,7 @@
           <a:bodyPr wrap="square" lIns="0" tIns="0" rIns="0" bIns="0" rtlCol="0" anchor="t"/>
           <a:lstStyle/>
           <a:p>
-            <a:pPr indent="0" marL="0">
+            <a:pPr marL="0" indent="0">
               <a:buNone/>
             </a:pPr>
             <a:r>
@@ -3057,7 +2781,7 @@
           </a:solidFill>
           <a:ln/>
           <a:effectLst>
-            <a:outerShdw sx="100000" sy="100000" kx="0" ky="0" algn="bl" rotWithShape="0" blurRad="101600" dist="38100" dir="5400000">
+            <a:outerShdw blurRad="101600" dist="38100" dir="5400000" algn="bl" rotWithShape="0">
               <a:srgbClr val="0A1626">
                 <a:alpha val="10000"/>
               </a:srgbClr>
@@ -3106,7 +2830,7 @@
           <a:bodyPr wrap="square" lIns="0" tIns="0" rIns="0" bIns="0" rtlCol="0" anchor="ctr"/>
           <a:lstStyle/>
           <a:p>
-            <a:pPr indent="0" marL="0">
+            <a:pPr marL="0" indent="0">
               <a:buNone/>
             </a:pPr>
             <a:r>
@@ -3145,7 +2869,7 @@
           <a:bodyPr wrap="square" lIns="0" tIns="0" rIns="0" bIns="0" rtlCol="0" anchor="t"/>
           <a:lstStyle/>
           <a:p>
-            <a:pPr indent="0" marL="0">
+            <a:pPr marL="0" indent="0">
               <a:buNone/>
             </a:pPr>
             <a:r>
@@ -3184,7 +2908,7 @@
           </a:solidFill>
           <a:ln/>
           <a:effectLst>
-            <a:outerShdw sx="100000" sy="100000" kx="0" ky="0" algn="bl" rotWithShape="0" blurRad="101600" dist="38100" dir="5400000">
+            <a:outerShdw blurRad="101600" dist="38100" dir="5400000" algn="bl" rotWithShape="0">
               <a:srgbClr val="0A1626">
                 <a:alpha val="10000"/>
               </a:srgbClr>
@@ -3233,7 +2957,7 @@
           <a:bodyPr wrap="square" lIns="0" tIns="0" rIns="0" bIns="0" rtlCol="0" anchor="ctr"/>
           <a:lstStyle/>
           <a:p>
-            <a:pPr indent="0" marL="0">
+            <a:pPr marL="0" indent="0">
               <a:buNone/>
             </a:pPr>
             <a:r>
@@ -3272,7 +2996,7 @@
           <a:bodyPr wrap="square" lIns="0" tIns="0" rIns="0" bIns="0" rtlCol="0" anchor="t"/>
           <a:lstStyle/>
           <a:p>
-            <a:pPr indent="0" marL="0">
+            <a:pPr marL="0" indent="0">
               <a:buNone/>
             </a:pPr>
             <a:r>
@@ -3311,7 +3035,7 @@
           <a:bodyPr wrap="square" lIns="0" tIns="0" rIns="0" bIns="0" rtlCol="0" anchor="ctr"/>
           <a:lstStyle/>
           <a:p>
-            <a:pPr indent="0" marL="0">
+            <a:pPr marL="0" indent="0">
               <a:buNone/>
             </a:pPr>
             <a:r>
@@ -3350,7 +3074,7 @@
           <a:bodyPr wrap="square" lIns="0" tIns="0" rIns="0" bIns="0" rtlCol="0" anchor="ctr"/>
           <a:lstStyle/>
           <a:p>
-            <a:pPr indent="0" marL="0">
+            <a:pPr marL="0" indent="0">
               <a:buNone/>
             </a:pPr>
             <a:r>
@@ -3364,9 +3088,6 @@
               </a:rPr>
               <a:t>SeaWatch</a:t>
             </a:r>
-            <a:pPr indent="0" marL="0">
-              <a:buNone/>
-            </a:pPr>
             <a:r>
               <a:rPr lang="en-US" sz="900" dirty="0">
                 <a:solidFill>
@@ -3403,7 +3124,7 @@
           <a:bodyPr wrap="square" rtlCol="0" anchor="ctr"/>
           <a:lstStyle/>
           <a:p>
-            <a:pPr algn="r" indent="0" marL="0">
+            <a:pPr marL="0" indent="0" algn="r">
               <a:buNone/>
             </a:pPr>
             <a:r>
@@ -3437,6 +3158,7 @@
         <a:solidFill>
           <a:srgbClr val="FFFFFF"/>
         </a:solidFill>
+        <a:effectLst/>
       </p:bgPr>
     </p:bg>
     <p:spTree>
@@ -3474,11 +3196,11 @@
           <a:bodyPr wrap="square" lIns="0" tIns="0" rIns="0" bIns="0" rtlCol="0" anchor="ctr"/>
           <a:lstStyle/>
           <a:p>
-            <a:pPr indent="0" marL="0">
-              <a:buNone/>
-            </a:pPr>
-            <a:r>
-              <a:rPr lang="en-US" sz="1250" b="1" spc="200" kern="0" dirty="0">
+            <a:pPr marL="0" indent="0">
+              <a:buNone/>
+            </a:pPr>
+            <a:r>
+              <a:rPr lang="en-US" sz="1250" b="1" kern="0" spc="200" dirty="0">
                 <a:solidFill>
                   <a:srgbClr val="2E6FB0"/>
                 </a:solidFill>
@@ -3513,7 +3235,7 @@
           <a:bodyPr wrap="square" lIns="0" tIns="0" rIns="0" bIns="0" rtlCol="0" anchor="ctr"/>
           <a:lstStyle/>
           <a:p>
-            <a:pPr indent="0" marL="0">
+            <a:pPr marL="0" indent="0">
               <a:buNone/>
             </a:pPr>
             <a:r>
@@ -3552,11 +3274,11 @@
           <a:bodyPr wrap="square" lIns="0" tIns="0" rIns="0" bIns="0" rtlCol="0" anchor="ctr"/>
           <a:lstStyle/>
           <a:p>
-            <a:pPr indent="0" marL="0">
-              <a:buNone/>
-            </a:pPr>
-            <a:r>
-              <a:rPr lang="en-US" sz="1250" b="1" spc="100" kern="0" dirty="0">
+            <a:pPr marL="0" indent="0">
+              <a:buNone/>
+            </a:pPr>
+            <a:r>
+              <a:rPr lang="en-US" sz="1250" b="1" kern="0" spc="100" dirty="0">
                 <a:solidFill>
                   <a:srgbClr val="13263B"/>
                 </a:solidFill>
@@ -3591,7 +3313,7 @@
           </a:solidFill>
           <a:ln/>
           <a:effectLst>
-            <a:outerShdw sx="100000" sy="100000" kx="0" ky="0" algn="bl" rotWithShape="0" blurRad="101600" dist="38100" dir="5400000">
+            <a:outerShdw blurRad="101600" dist="38100" dir="5400000" algn="bl" rotWithShape="0">
               <a:srgbClr val="0A1626">
                 <a:alpha val="10000"/>
               </a:srgbClr>
@@ -3620,7 +3342,7 @@
           <a:bodyPr wrap="square" lIns="0" tIns="0" rIns="0" bIns="0" rtlCol="0" anchor="ctr"/>
           <a:lstStyle/>
           <a:p>
-            <a:pPr indent="0" marL="0">
+            <a:pPr marL="0" indent="0">
               <a:buNone/>
             </a:pPr>
             <a:r>
@@ -3659,7 +3381,7 @@
           <a:bodyPr wrap="square" lIns="0" tIns="0" rIns="0" bIns="0" rtlCol="0" anchor="ctr"/>
           <a:lstStyle/>
           <a:p>
-            <a:pPr indent="0" marL="0">
+            <a:pPr marL="0" indent="0">
               <a:buNone/>
             </a:pPr>
             <a:r>
@@ -3698,7 +3420,7 @@
           </a:solidFill>
           <a:ln/>
           <a:effectLst>
-            <a:outerShdw sx="100000" sy="100000" kx="0" ky="0" algn="bl" rotWithShape="0" blurRad="101600" dist="38100" dir="5400000">
+            <a:outerShdw blurRad="101600" dist="38100" dir="5400000" algn="bl" rotWithShape="0">
               <a:srgbClr val="0A1626">
                 <a:alpha val="10000"/>
               </a:srgbClr>
@@ -3727,7 +3449,7 @@
           <a:bodyPr wrap="square" lIns="0" tIns="0" rIns="0" bIns="0" rtlCol="0" anchor="ctr"/>
           <a:lstStyle/>
           <a:p>
-            <a:pPr indent="0" marL="0">
+            <a:pPr marL="0" indent="0">
               <a:buNone/>
             </a:pPr>
             <a:r>
@@ -3766,7 +3488,7 @@
           <a:bodyPr wrap="square" lIns="0" tIns="0" rIns="0" bIns="0" rtlCol="0" anchor="ctr"/>
           <a:lstStyle/>
           <a:p>
-            <a:pPr indent="0" marL="0">
+            <a:pPr marL="0" indent="0">
               <a:buNone/>
             </a:pPr>
             <a:r>
@@ -3805,7 +3527,7 @@
           </a:solidFill>
           <a:ln/>
           <a:effectLst>
-            <a:outerShdw sx="100000" sy="100000" kx="0" ky="0" algn="bl" rotWithShape="0" blurRad="101600" dist="38100" dir="5400000">
+            <a:outerShdw blurRad="101600" dist="38100" dir="5400000" algn="bl" rotWithShape="0">
               <a:srgbClr val="0A1626">
                 <a:alpha val="10000"/>
               </a:srgbClr>
@@ -3834,7 +3556,7 @@
           <a:bodyPr wrap="square" lIns="0" tIns="0" rIns="0" bIns="0" rtlCol="0" anchor="ctr"/>
           <a:lstStyle/>
           <a:p>
-            <a:pPr indent="0" marL="0">
+            <a:pPr marL="0" indent="0">
               <a:buNone/>
             </a:pPr>
             <a:r>
@@ -3873,7 +3595,7 @@
           <a:bodyPr wrap="square" lIns="0" tIns="0" rIns="0" bIns="0" rtlCol="0" anchor="ctr"/>
           <a:lstStyle/>
           <a:p>
-            <a:pPr indent="0" marL="0">
+            <a:pPr marL="0" indent="0">
               <a:buNone/>
             </a:pPr>
             <a:r>
@@ -3912,7 +3634,7 @@
           </a:solidFill>
           <a:ln/>
           <a:effectLst>
-            <a:outerShdw sx="100000" sy="100000" kx="0" ky="0" algn="bl" rotWithShape="0" blurRad="101600" dist="38100" dir="5400000">
+            <a:outerShdw blurRad="101600" dist="38100" dir="5400000" algn="bl" rotWithShape="0">
               <a:srgbClr val="0A1626">
                 <a:alpha val="10000"/>
               </a:srgbClr>
@@ -3941,7 +3663,7 @@
           <a:bodyPr wrap="square" lIns="0" tIns="0" rIns="0" bIns="0" rtlCol="0" anchor="ctr"/>
           <a:lstStyle/>
           <a:p>
-            <a:pPr indent="0" marL="0">
+            <a:pPr marL="0" indent="0">
               <a:buNone/>
             </a:pPr>
             <a:r>
@@ -3980,7 +3702,7 @@
           <a:bodyPr wrap="square" lIns="0" tIns="0" rIns="0" bIns="0" rtlCol="0" anchor="ctr"/>
           <a:lstStyle/>
           <a:p>
-            <a:pPr indent="0" marL="0">
+            <a:pPr marL="0" indent="0">
               <a:buNone/>
             </a:pPr>
             <a:r>
@@ -4019,7 +3741,7 @@
           </a:solidFill>
           <a:ln/>
           <a:effectLst>
-            <a:outerShdw sx="100000" sy="100000" kx="0" ky="0" algn="bl" rotWithShape="0" blurRad="101600" dist="38100" dir="5400000">
+            <a:outerShdw blurRad="101600" dist="38100" dir="5400000" algn="bl" rotWithShape="0">
               <a:srgbClr val="0A1626">
                 <a:alpha val="10000"/>
               </a:srgbClr>
@@ -4048,7 +3770,7 @@
           <a:bodyPr wrap="square" lIns="0" tIns="0" rIns="0" bIns="0" rtlCol="0" anchor="ctr"/>
           <a:lstStyle/>
           <a:p>
-            <a:pPr indent="0" marL="0">
+            <a:pPr marL="0" indent="0">
               <a:buNone/>
             </a:pPr>
             <a:r>
@@ -4087,7 +3809,7 @@
           <a:bodyPr wrap="square" lIns="0" tIns="0" rIns="0" bIns="0" rtlCol="0" anchor="ctr"/>
           <a:lstStyle/>
           <a:p>
-            <a:pPr indent="0" marL="0">
+            <a:pPr marL="0" indent="0">
               <a:buNone/>
             </a:pPr>
             <a:r>
@@ -4126,7 +3848,7 @@
           </a:solidFill>
           <a:ln/>
           <a:effectLst>
-            <a:outerShdw sx="100000" sy="100000" kx="0" ky="0" algn="bl" rotWithShape="0" blurRad="101600" dist="38100" dir="5400000">
+            <a:outerShdw blurRad="101600" dist="38100" dir="5400000" algn="bl" rotWithShape="0">
               <a:srgbClr val="0A1626">
                 <a:alpha val="10000"/>
               </a:srgbClr>
@@ -4155,7 +3877,7 @@
           <a:bodyPr wrap="square" lIns="0" tIns="0" rIns="0" bIns="0" rtlCol="0" anchor="ctr"/>
           <a:lstStyle/>
           <a:p>
-            <a:pPr indent="0" marL="0">
+            <a:pPr marL="0" indent="0">
               <a:buNone/>
             </a:pPr>
             <a:r>
@@ -4194,7 +3916,7 @@
           <a:bodyPr wrap="square" lIns="0" tIns="0" rIns="0" bIns="0" rtlCol="0" anchor="t"/>
           <a:lstStyle/>
           <a:p>
-            <a:pPr indent="0" marL="0">
+            <a:pPr marL="0" indent="0">
               <a:buNone/>
             </a:pPr>
             <a:r>
@@ -4233,7 +3955,7 @@
           </a:solidFill>
           <a:ln/>
           <a:effectLst>
-            <a:outerShdw sx="100000" sy="100000" kx="0" ky="0" algn="bl" rotWithShape="0" blurRad="101600" dist="38100" dir="5400000">
+            <a:outerShdw blurRad="101600" dist="38100" dir="5400000" algn="bl" rotWithShape="0">
               <a:srgbClr val="0A1626">
                 <a:alpha val="10000"/>
               </a:srgbClr>
@@ -4262,7 +3984,7 @@
           <a:bodyPr wrap="square" lIns="0" tIns="0" rIns="0" bIns="0" rtlCol="0" anchor="ctr"/>
           <a:lstStyle/>
           <a:p>
-            <a:pPr indent="0" marL="0">
+            <a:pPr marL="0" indent="0">
               <a:buNone/>
             </a:pPr>
             <a:r>
@@ -4301,7 +4023,7 @@
           <a:bodyPr wrap="square" lIns="0" tIns="0" rIns="0" bIns="0" rtlCol="0" anchor="t"/>
           <a:lstStyle/>
           <a:p>
-            <a:pPr indent="0" marL="0">
+            <a:pPr marL="0" indent="0">
               <a:buNone/>
             </a:pPr>
             <a:r>
@@ -4340,7 +4062,7 @@
           </a:solidFill>
           <a:ln/>
           <a:effectLst>
-            <a:outerShdw sx="100000" sy="100000" kx="0" ky="0" algn="bl" rotWithShape="0" blurRad="101600" dist="38100" dir="5400000">
+            <a:outerShdw blurRad="101600" dist="38100" dir="5400000" algn="bl" rotWithShape="0">
               <a:srgbClr val="0A1626">
                 <a:alpha val="10000"/>
               </a:srgbClr>
@@ -4369,7 +4091,7 @@
           <a:bodyPr wrap="square" lIns="0" tIns="0" rIns="0" bIns="0" rtlCol="0" anchor="ctr"/>
           <a:lstStyle/>
           <a:p>
-            <a:pPr indent="0" marL="0">
+            <a:pPr marL="0" indent="0">
               <a:buNone/>
             </a:pPr>
             <a:r>
@@ -4408,7 +4130,7 @@
           <a:bodyPr wrap="square" lIns="0" tIns="0" rIns="0" bIns="0" rtlCol="0" anchor="t"/>
           <a:lstStyle/>
           <a:p>
-            <a:pPr indent="0" marL="0">
+            <a:pPr marL="0" indent="0">
               <a:buNone/>
             </a:pPr>
             <a:r>
@@ -4447,7 +4169,7 @@
           </a:solidFill>
           <a:ln/>
           <a:effectLst>
-            <a:outerShdw sx="100000" sy="100000" kx="0" ky="0" algn="bl" rotWithShape="0" blurRad="101600" dist="38100" dir="5400000">
+            <a:outerShdw blurRad="101600" dist="38100" dir="5400000" algn="bl" rotWithShape="0">
               <a:srgbClr val="0A1626">
                 <a:alpha val="10000"/>
               </a:srgbClr>
@@ -4476,7 +4198,7 @@
           <a:bodyPr wrap="square" lIns="0" tIns="0" rIns="0" bIns="0" rtlCol="0" anchor="ctr"/>
           <a:lstStyle/>
           <a:p>
-            <a:pPr indent="0" marL="0">
+            <a:pPr marL="0" indent="0">
               <a:buNone/>
             </a:pPr>
             <a:r>
@@ -4515,7 +4237,7 @@
           <a:bodyPr wrap="square" lIns="0" tIns="0" rIns="0" bIns="0" rtlCol="0" anchor="t"/>
           <a:lstStyle/>
           <a:p>
-            <a:pPr indent="0" marL="0">
+            <a:pPr marL="0" indent="0">
               <a:buNone/>
             </a:pPr>
             <a:r>
@@ -4554,7 +4276,7 @@
           <a:bodyPr wrap="square" lIns="0" tIns="0" rIns="0" bIns="0" rtlCol="0" anchor="ctr"/>
           <a:lstStyle/>
           <a:p>
-            <a:pPr indent="0" marL="0">
+            <a:pPr marL="0" indent="0">
               <a:buNone/>
             </a:pPr>
             <a:r>
@@ -4568,9 +4290,6 @@
               </a:rPr>
               <a:t>SeaWatch</a:t>
             </a:r>
-            <a:pPr indent="0" marL="0">
-              <a:buNone/>
-            </a:pPr>
             <a:r>
               <a:rPr lang="en-US" sz="900" dirty="0">
                 <a:solidFill>
@@ -4607,7 +4326,7 @@
           <a:bodyPr wrap="square" rtlCol="0" anchor="ctr"/>
           <a:lstStyle/>
           <a:p>
-            <a:pPr algn="r" indent="0" marL="0">
+            <a:pPr marL="0" indent="0" algn="r">
               <a:buNone/>
             </a:pPr>
             <a:r>
@@ -4641,6 +4360,7 @@
         <a:solidFill>
           <a:srgbClr val="FFFFFF"/>
         </a:solidFill>
+        <a:effectLst/>
       </p:bgPr>
     </p:bg>
     <p:spTree>
@@ -4678,11 +4398,11 @@
           <a:bodyPr wrap="square" lIns="0" tIns="0" rIns="0" bIns="0" rtlCol="0" anchor="ctr"/>
           <a:lstStyle/>
           <a:p>
-            <a:pPr indent="0" marL="0">
-              <a:buNone/>
-            </a:pPr>
-            <a:r>
-              <a:rPr lang="en-US" sz="1250" b="1" spc="200" kern="0" dirty="0">
+            <a:pPr marL="0" indent="0">
+              <a:buNone/>
+            </a:pPr>
+            <a:r>
+              <a:rPr lang="en-US" sz="1250" b="1" kern="0" spc="200" dirty="0">
                 <a:solidFill>
                   <a:srgbClr val="F2C200"/>
                 </a:solidFill>
@@ -4717,7 +4437,7 @@
           <a:bodyPr wrap="square" lIns="0" tIns="0" rIns="0" bIns="0" rtlCol="0" anchor="ctr"/>
           <a:lstStyle/>
           <a:p>
-            <a:pPr indent="0" marL="0">
+            <a:pPr marL="0" indent="0">
               <a:buNone/>
             </a:pPr>
             <a:r>
@@ -4756,7 +4476,7 @@
           </a:solidFill>
           <a:ln/>
           <a:effectLst>
-            <a:outerShdw sx="100000" sy="100000" kx="0" ky="0" algn="bl" rotWithShape="0" blurRad="101600" dist="38100" dir="5400000">
+            <a:outerShdw blurRad="101600" dist="38100" dir="5400000" algn="bl" rotWithShape="0">
               <a:srgbClr val="0A1626">
                 <a:alpha val="10000"/>
               </a:srgbClr>
@@ -4783,7 +4503,7 @@
           </a:solidFill>
           <a:ln/>
           <a:effectLst>
-            <a:outerShdw sx="100000" sy="100000" kx="0" ky="0" algn="bl" rotWithShape="0" blurRad="76200" dist="25400" dir="5400000">
+            <a:outerShdw blurRad="76200" dist="25400" dir="5400000" algn="bl" rotWithShape="0">
               <a:srgbClr val="0A1626">
                 <a:alpha val="18000"/>
               </a:srgbClr>
@@ -4812,7 +4532,7 @@
           <a:bodyPr wrap="square" lIns="0" tIns="0" rIns="0" bIns="0" rtlCol="0" anchor="ctr"/>
           <a:lstStyle/>
           <a:p>
-            <a:pPr algn="ctr" indent="0" marL="0">
+            <a:pPr marL="0" indent="0" algn="ctr">
               <a:buNone/>
             </a:pPr>
             <a:r>
@@ -4851,7 +4571,7 @@
           <a:bodyPr wrap="square" lIns="0" tIns="0" rIns="0" bIns="0" rtlCol="0" anchor="ctr"/>
           <a:lstStyle/>
           <a:p>
-            <a:pPr indent="0" marL="0">
+            <a:pPr marL="0" indent="0">
               <a:buNone/>
             </a:pPr>
             <a:r>
@@ -4890,7 +4610,7 @@
           <a:bodyPr wrap="square" lIns="0" tIns="0" rIns="0" bIns="0" rtlCol="0" anchor="t"/>
           <a:lstStyle/>
           <a:p>
-            <a:pPr indent="0" marL="0">
+            <a:pPr marL="0" indent="0">
               <a:buNone/>
             </a:pPr>
             <a:r>
@@ -4929,7 +4649,7 @@
           </a:solidFill>
           <a:ln/>
           <a:effectLst>
-            <a:outerShdw sx="100000" sy="100000" kx="0" ky="0" algn="bl" rotWithShape="0" blurRad="101600" dist="38100" dir="5400000">
+            <a:outerShdw blurRad="101600" dist="38100" dir="5400000" algn="bl" rotWithShape="0">
               <a:srgbClr val="0A1626">
                 <a:alpha val="10000"/>
               </a:srgbClr>
@@ -4956,7 +4676,7 @@
           </a:solidFill>
           <a:ln/>
           <a:effectLst>
-            <a:outerShdw sx="100000" sy="100000" kx="0" ky="0" algn="bl" rotWithShape="0" blurRad="76200" dist="25400" dir="5400000">
+            <a:outerShdw blurRad="76200" dist="25400" dir="5400000" algn="bl" rotWithShape="0">
               <a:srgbClr val="0A1626">
                 <a:alpha val="18000"/>
               </a:srgbClr>
@@ -4985,7 +4705,7 @@
           <a:bodyPr wrap="square" lIns="0" tIns="0" rIns="0" bIns="0" rtlCol="0" anchor="ctr"/>
           <a:lstStyle/>
           <a:p>
-            <a:pPr algn="ctr" indent="0" marL="0">
+            <a:pPr marL="0" indent="0" algn="ctr">
               <a:buNone/>
             </a:pPr>
             <a:r>
@@ -5024,7 +4744,7 @@
           <a:bodyPr wrap="square" lIns="0" tIns="0" rIns="0" bIns="0" rtlCol="0" anchor="ctr"/>
           <a:lstStyle/>
           <a:p>
-            <a:pPr indent="0" marL="0">
+            <a:pPr marL="0" indent="0">
               <a:buNone/>
             </a:pPr>
             <a:r>
@@ -5063,7 +4783,7 @@
           <a:bodyPr wrap="square" lIns="0" tIns="0" rIns="0" bIns="0" rtlCol="0" anchor="t"/>
           <a:lstStyle/>
           <a:p>
-            <a:pPr indent="0" marL="0">
+            <a:pPr marL="0" indent="0">
               <a:buNone/>
             </a:pPr>
             <a:r>
@@ -5102,7 +4822,7 @@
           </a:solidFill>
           <a:ln/>
           <a:effectLst>
-            <a:outerShdw sx="100000" sy="100000" kx="0" ky="0" algn="bl" rotWithShape="0" blurRad="101600" dist="38100" dir="5400000">
+            <a:outerShdw blurRad="101600" dist="38100" dir="5400000" algn="bl" rotWithShape="0">
               <a:srgbClr val="0A1626">
                 <a:alpha val="10000"/>
               </a:srgbClr>
@@ -5129,7 +4849,7 @@
           </a:solidFill>
           <a:ln/>
           <a:effectLst>
-            <a:outerShdw sx="100000" sy="100000" kx="0" ky="0" algn="bl" rotWithShape="0" blurRad="76200" dist="25400" dir="5400000">
+            <a:outerShdw blurRad="76200" dist="25400" dir="5400000" algn="bl" rotWithShape="0">
               <a:srgbClr val="0A1626">
                 <a:alpha val="18000"/>
               </a:srgbClr>
@@ -5158,7 +4878,7 @@
           <a:bodyPr wrap="square" lIns="0" tIns="0" rIns="0" bIns="0" rtlCol="0" anchor="ctr"/>
           <a:lstStyle/>
           <a:p>
-            <a:pPr algn="ctr" indent="0" marL="0">
+            <a:pPr marL="0" indent="0" algn="ctr">
               <a:buNone/>
             </a:pPr>
             <a:r>
@@ -5197,7 +4917,7 @@
           <a:bodyPr wrap="square" lIns="0" tIns="0" rIns="0" bIns="0" rtlCol="0" anchor="ctr"/>
           <a:lstStyle/>
           <a:p>
-            <a:pPr indent="0" marL="0">
+            <a:pPr marL="0" indent="0">
               <a:buNone/>
             </a:pPr>
             <a:r>
@@ -5236,7 +4956,7 @@
           <a:bodyPr wrap="square" lIns="0" tIns="0" rIns="0" bIns="0" rtlCol="0" anchor="t"/>
           <a:lstStyle/>
           <a:p>
-            <a:pPr indent="0" marL="0">
+            <a:pPr marL="0" indent="0">
               <a:buNone/>
             </a:pPr>
             <a:r>
@@ -5275,7 +4995,7 @@
           </a:solidFill>
           <a:ln/>
           <a:effectLst>
-            <a:outerShdw sx="100000" sy="100000" kx="0" ky="0" algn="bl" rotWithShape="0" blurRad="101600" dist="38100" dir="5400000">
+            <a:outerShdw blurRad="101600" dist="38100" dir="5400000" algn="bl" rotWithShape="0">
               <a:srgbClr val="0A1626">
                 <a:alpha val="10000"/>
               </a:srgbClr>
@@ -5302,7 +5022,7 @@
           </a:solidFill>
           <a:ln/>
           <a:effectLst>
-            <a:outerShdw sx="100000" sy="100000" kx="0" ky="0" algn="bl" rotWithShape="0" blurRad="76200" dist="25400" dir="5400000">
+            <a:outerShdw blurRad="76200" dist="25400" dir="5400000" algn="bl" rotWithShape="0">
               <a:srgbClr val="0A1626">
                 <a:alpha val="18000"/>
               </a:srgbClr>
@@ -5331,7 +5051,7 @@
           <a:bodyPr wrap="square" lIns="0" tIns="0" rIns="0" bIns="0" rtlCol="0" anchor="ctr"/>
           <a:lstStyle/>
           <a:p>
-            <a:pPr algn="ctr" indent="0" marL="0">
+            <a:pPr marL="0" indent="0" algn="ctr">
               <a:buNone/>
             </a:pPr>
             <a:r>
@@ -5370,7 +5090,7 @@
           <a:bodyPr wrap="square" lIns="0" tIns="0" rIns="0" bIns="0" rtlCol="0" anchor="ctr"/>
           <a:lstStyle/>
           <a:p>
-            <a:pPr indent="0" marL="0">
+            <a:pPr marL="0" indent="0">
               <a:buNone/>
             </a:pPr>
             <a:r>
@@ -5409,7 +5129,7 @@
           <a:bodyPr wrap="square" lIns="0" tIns="0" rIns="0" bIns="0" rtlCol="0" anchor="t"/>
           <a:lstStyle/>
           <a:p>
-            <a:pPr indent="0" marL="0">
+            <a:pPr marL="0" indent="0">
               <a:buNone/>
             </a:pPr>
             <a:r>
@@ -5448,7 +5168,7 @@
           <a:bodyPr wrap="square" lIns="0" tIns="0" rIns="0" bIns="0" rtlCol="0" anchor="ctr"/>
           <a:lstStyle/>
           <a:p>
-            <a:pPr indent="0" marL="0">
+            <a:pPr marL="0" indent="0">
               <a:buNone/>
             </a:pPr>
             <a:r>
@@ -5462,9 +5182,6 @@
               </a:rPr>
               <a:t>SeaWatch</a:t>
             </a:r>
-            <a:pPr indent="0" marL="0">
-              <a:buNone/>
-            </a:pPr>
             <a:r>
               <a:rPr lang="en-US" sz="900" dirty="0">
                 <a:solidFill>
@@ -5501,7 +5218,7 @@
           <a:bodyPr wrap="square" rtlCol="0" anchor="ctr"/>
           <a:lstStyle/>
           <a:p>
-            <a:pPr algn="r" indent="0" marL="0">
+            <a:pPr marL="0" indent="0" algn="r">
               <a:buNone/>
             </a:pPr>
             <a:r>
@@ -5535,6 +5252,7 @@
         <a:solidFill>
           <a:srgbClr val="FFFFFF"/>
         </a:solidFill>
+        <a:effectLst/>
       </p:bgPr>
     </p:bg>
     <p:spTree>
@@ -5572,11 +5290,11 @@
           <a:bodyPr wrap="square" lIns="0" tIns="0" rIns="0" bIns="0" rtlCol="0" anchor="ctr"/>
           <a:lstStyle/>
           <a:p>
-            <a:pPr indent="0" marL="0">
-              <a:buNone/>
-            </a:pPr>
-            <a:r>
-              <a:rPr lang="en-US" sz="1250" b="1" spc="200" kern="0" dirty="0">
+            <a:pPr marL="0" indent="0">
+              <a:buNone/>
+            </a:pPr>
+            <a:r>
+              <a:rPr lang="en-US" sz="1250" b="1" kern="0" spc="200" dirty="0">
                 <a:solidFill>
                   <a:srgbClr val="2E6FB0"/>
                 </a:solidFill>
@@ -5611,7 +5329,7 @@
           <a:bodyPr wrap="square" lIns="0" tIns="0" rIns="0" bIns="0" rtlCol="0" anchor="ctr"/>
           <a:lstStyle/>
           <a:p>
-            <a:pPr indent="0" marL="0">
+            <a:pPr marL="0" indent="0">
               <a:buNone/>
             </a:pPr>
             <a:r>
@@ -5650,7 +5368,7 @@
           </a:solidFill>
           <a:ln/>
           <a:effectLst>
-            <a:outerShdw sx="100000" sy="100000" kx="0" ky="0" algn="bl" rotWithShape="0" blurRad="101600" dist="38100" dir="5400000">
+            <a:outerShdw blurRad="101600" dist="38100" dir="5400000" algn="bl" rotWithShape="0">
               <a:srgbClr val="0A1626">
                 <a:alpha val="10000"/>
               </a:srgbClr>
@@ -5679,7 +5397,7 @@
           <a:bodyPr wrap="square" lIns="0" tIns="0" rIns="0" bIns="0" rtlCol="0" anchor="ctr"/>
           <a:lstStyle/>
           <a:p>
-            <a:pPr indent="0" marL="0">
+            <a:pPr marL="0" indent="0">
               <a:buNone/>
             </a:pPr>
             <a:r>
@@ -5718,7 +5436,7 @@
           <a:bodyPr wrap="square" lIns="0" tIns="0" rIns="0" bIns="0" rtlCol="0" anchor="ctr"/>
           <a:lstStyle/>
           <a:p>
-            <a:pPr indent="0" marL="0">
+            <a:pPr marL="0" indent="0">
               <a:buNone/>
             </a:pPr>
             <a:r>
@@ -5757,7 +5475,7 @@
           </a:solidFill>
           <a:ln/>
           <a:effectLst>
-            <a:outerShdw sx="100000" sy="100000" kx="0" ky="0" algn="bl" rotWithShape="0" blurRad="101600" dist="38100" dir="5400000">
+            <a:outerShdw blurRad="101600" dist="38100" dir="5400000" algn="bl" rotWithShape="0">
               <a:srgbClr val="0A1626">
                 <a:alpha val="10000"/>
               </a:srgbClr>
@@ -5786,7 +5504,7 @@
           <a:bodyPr wrap="square" lIns="0" tIns="0" rIns="0" bIns="0" rtlCol="0" anchor="ctr"/>
           <a:lstStyle/>
           <a:p>
-            <a:pPr indent="0" marL="0">
+            <a:pPr marL="0" indent="0">
               <a:buNone/>
             </a:pPr>
             <a:r>
@@ -5825,7 +5543,7 @@
           <a:bodyPr wrap="square" lIns="0" tIns="0" rIns="0" bIns="0" rtlCol="0" anchor="ctr"/>
           <a:lstStyle/>
           <a:p>
-            <a:pPr indent="0" marL="0">
+            <a:pPr marL="0" indent="0">
               <a:buNone/>
             </a:pPr>
             <a:r>
@@ -5864,7 +5582,7 @@
           </a:solidFill>
           <a:ln/>
           <a:effectLst>
-            <a:outerShdw sx="100000" sy="100000" kx="0" ky="0" algn="bl" rotWithShape="0" blurRad="101600" dist="38100" dir="5400000">
+            <a:outerShdw blurRad="101600" dist="38100" dir="5400000" algn="bl" rotWithShape="0">
               <a:srgbClr val="0A1626">
                 <a:alpha val="10000"/>
               </a:srgbClr>
@@ -5893,7 +5611,7 @@
           <a:bodyPr wrap="square" lIns="0" tIns="0" rIns="0" bIns="0" rtlCol="0" anchor="ctr"/>
           <a:lstStyle/>
           <a:p>
-            <a:pPr indent="0" marL="0">
+            <a:pPr marL="0" indent="0">
               <a:buNone/>
             </a:pPr>
             <a:r>
@@ -5932,7 +5650,7 @@
           <a:bodyPr wrap="square" lIns="0" tIns="0" rIns="0" bIns="0" rtlCol="0" anchor="ctr"/>
           <a:lstStyle/>
           <a:p>
-            <a:pPr indent="0" marL="0">
+            <a:pPr marL="0" indent="0">
               <a:buNone/>
             </a:pPr>
             <a:r>
@@ -5971,7 +5689,7 @@
           </a:solidFill>
           <a:ln/>
           <a:effectLst>
-            <a:outerShdw sx="100000" sy="100000" kx="0" ky="0" algn="bl" rotWithShape="0" blurRad="101600" dist="38100" dir="5400000">
+            <a:outerShdw blurRad="101600" dist="38100" dir="5400000" algn="bl" rotWithShape="0">
               <a:srgbClr val="0A1626">
                 <a:alpha val="10000"/>
               </a:srgbClr>
@@ -6000,7 +5718,7 @@
           <a:bodyPr wrap="square" lIns="0" tIns="0" rIns="0" bIns="0" rtlCol="0" anchor="ctr"/>
           <a:lstStyle/>
           <a:p>
-            <a:pPr indent="0" marL="0">
+            <a:pPr marL="0" indent="0">
               <a:buNone/>
             </a:pPr>
             <a:r>
@@ -6039,7 +5757,7 @@
           <a:bodyPr wrap="square" lIns="0" tIns="0" rIns="0" bIns="0" rtlCol="0" anchor="ctr"/>
           <a:lstStyle/>
           <a:p>
-            <a:pPr indent="0" marL="0">
+            <a:pPr marL="0" indent="0">
               <a:buNone/>
             </a:pPr>
             <a:r>
@@ -6078,7 +5796,7 @@
           <a:bodyPr wrap="square" lIns="0" tIns="0" rIns="0" bIns="0" rtlCol="0" anchor="ctr"/>
           <a:lstStyle/>
           <a:p>
-            <a:pPr indent="0" marL="0">
+            <a:pPr marL="0" indent="0">
               <a:buNone/>
             </a:pPr>
             <a:r>
@@ -6117,7 +5835,7 @@
           <a:bodyPr wrap="square" lIns="0" tIns="0" rIns="0" bIns="0" rtlCol="0" anchor="ctr"/>
           <a:lstStyle/>
           <a:p>
-            <a:pPr indent="0" marL="0">
+            <a:pPr marL="0" indent="0">
               <a:buNone/>
             </a:pPr>
             <a:r>
@@ -6131,9 +5849,6 @@
               </a:rPr>
               <a:t>SeaWatch</a:t>
             </a:r>
-            <a:pPr indent="0" marL="0">
-              <a:buNone/>
-            </a:pPr>
             <a:r>
               <a:rPr lang="en-US" sz="900" dirty="0">
                 <a:solidFill>
@@ -6170,7 +5885,7 @@
           <a:bodyPr wrap="square" rtlCol="0" anchor="ctr"/>
           <a:lstStyle/>
           <a:p>
-            <a:pPr algn="r" indent="0" marL="0">
+            <a:pPr marL="0" indent="0" algn="r">
               <a:buNone/>
             </a:pPr>
             <a:r>
@@ -6204,6 +5919,7 @@
         <a:solidFill>
           <a:srgbClr val="0A1A2E"/>
         </a:solidFill>
+        <a:effectLst/>
       </p:bgPr>
     </p:bg>
     <p:spTree>
@@ -6241,11 +5957,11 @@
           <a:bodyPr wrap="square" lIns="0" tIns="0" rIns="0" bIns="0" rtlCol="0" anchor="ctr"/>
           <a:lstStyle/>
           <a:p>
-            <a:pPr indent="0" marL="0">
-              <a:buNone/>
-            </a:pPr>
-            <a:r>
-              <a:rPr lang="en-US" sz="1250" b="1" spc="200" kern="0" dirty="0">
+            <a:pPr marL="0" indent="0">
+              <a:buNone/>
+            </a:pPr>
+            <a:r>
+              <a:rPr lang="en-US" sz="1250" b="1" kern="0" spc="200" dirty="0">
                 <a:solidFill>
                   <a:srgbClr val="F2C200"/>
                 </a:solidFill>
@@ -6280,7 +5996,7 @@
           <a:bodyPr wrap="square" lIns="0" tIns="0" rIns="0" bIns="0" rtlCol="0" anchor="t"/>
           <a:lstStyle/>
           <a:p>
-            <a:pPr indent="0" marL="0">
+            <a:pPr marL="0" indent="0">
               <a:buNone/>
             </a:pPr>
             <a:r>
@@ -6319,7 +6035,7 @@
           </a:solidFill>
           <a:ln/>
           <a:effectLst>
-            <a:outerShdw sx="100000" sy="100000" kx="0" ky="0" algn="bl" rotWithShape="0" blurRad="101600" dist="38100" dir="5400000">
+            <a:outerShdw blurRad="101600" dist="38100" dir="5400000" algn="bl" rotWithShape="0">
               <a:srgbClr val="0A1626">
                 <a:alpha val="10000"/>
               </a:srgbClr>
@@ -6348,7 +6064,7 @@
           <a:bodyPr wrap="square" lIns="0" tIns="0" rIns="0" bIns="0" rtlCol="0" anchor="t"/>
           <a:lstStyle/>
           <a:p>
-            <a:pPr indent="0" marL="0">
+            <a:pPr marL="0" indent="0">
               <a:buNone/>
             </a:pPr>
             <a:r>
@@ -6387,7 +6103,7 @@
           <a:bodyPr wrap="square" lIns="0" tIns="0" rIns="0" bIns="0" rtlCol="0" anchor="t"/>
           <a:lstStyle/>
           <a:p>
-            <a:pPr indent="0" marL="0">
+            <a:pPr marL="0" indent="0">
               <a:buNone/>
             </a:pPr>
             <a:r>
@@ -6426,7 +6142,7 @@
           </a:solidFill>
           <a:ln/>
           <a:effectLst>
-            <a:outerShdw sx="100000" sy="100000" kx="0" ky="0" algn="bl" rotWithShape="0" blurRad="101600" dist="38100" dir="5400000">
+            <a:outerShdw blurRad="101600" dist="38100" dir="5400000" algn="bl" rotWithShape="0">
               <a:srgbClr val="0A1626">
                 <a:alpha val="10000"/>
               </a:srgbClr>
@@ -6455,7 +6171,7 @@
           <a:bodyPr wrap="square" lIns="0" tIns="0" rIns="0" bIns="0" rtlCol="0" anchor="t"/>
           <a:lstStyle/>
           <a:p>
-            <a:pPr indent="0" marL="0">
+            <a:pPr marL="0" indent="0">
               <a:buNone/>
             </a:pPr>
             <a:r>
@@ -6494,7 +6210,7 @@
           <a:bodyPr wrap="square" lIns="0" tIns="0" rIns="0" bIns="0" rtlCol="0" anchor="t"/>
           <a:lstStyle/>
           <a:p>
-            <a:pPr indent="0" marL="0">
+            <a:pPr marL="0" indent="0">
               <a:buNone/>
             </a:pPr>
             <a:r>
@@ -6533,7 +6249,7 @@
           </a:solidFill>
           <a:ln/>
           <a:effectLst>
-            <a:outerShdw sx="100000" sy="100000" kx="0" ky="0" algn="bl" rotWithShape="0" blurRad="101600" dist="38100" dir="5400000">
+            <a:outerShdw blurRad="101600" dist="38100" dir="5400000" algn="bl" rotWithShape="0">
               <a:srgbClr val="0A1626">
                 <a:alpha val="10000"/>
               </a:srgbClr>
@@ -6562,7 +6278,7 @@
           <a:bodyPr wrap="square" lIns="0" tIns="0" rIns="0" bIns="0" rtlCol="0" anchor="t"/>
           <a:lstStyle/>
           <a:p>
-            <a:pPr indent="0" marL="0">
+            <a:pPr marL="0" indent="0">
               <a:buNone/>
             </a:pPr>
             <a:r>
@@ -6601,7 +6317,7 @@
           <a:bodyPr wrap="square" lIns="0" tIns="0" rIns="0" bIns="0" rtlCol="0" anchor="t"/>
           <a:lstStyle/>
           <a:p>
-            <a:pPr indent="0" marL="0">
+            <a:pPr marL="0" indent="0">
               <a:buNone/>
             </a:pPr>
             <a:r>
@@ -6640,7 +6356,7 @@
           </a:solidFill>
           <a:ln/>
           <a:effectLst>
-            <a:outerShdw sx="100000" sy="100000" kx="0" ky="0" algn="bl" rotWithShape="0" blurRad="101600" dist="38100" dir="5400000">
+            <a:outerShdw blurRad="101600" dist="38100" dir="5400000" algn="bl" rotWithShape="0">
               <a:srgbClr val="0A1626">
                 <a:alpha val="10000"/>
               </a:srgbClr>
@@ -6669,7 +6385,7 @@
           <a:bodyPr wrap="square" lIns="0" tIns="0" rIns="0" bIns="0" rtlCol="0" anchor="t"/>
           <a:lstStyle/>
           <a:p>
-            <a:pPr indent="0" marL="0">
+            <a:pPr marL="0" indent="0">
               <a:buNone/>
             </a:pPr>
             <a:r>
@@ -6708,7 +6424,7 @@
           <a:bodyPr wrap="square" lIns="0" tIns="0" rIns="0" bIns="0" rtlCol="0" anchor="t"/>
           <a:lstStyle/>
           <a:p>
-            <a:pPr indent="0" marL="0">
+            <a:pPr marL="0" indent="0">
               <a:buNone/>
             </a:pPr>
             <a:r>
@@ -6747,7 +6463,7 @@
           <a:bodyPr wrap="square" lIns="0" tIns="0" rIns="0" bIns="0" rtlCol="0" anchor="ctr"/>
           <a:lstStyle/>
           <a:p>
-            <a:pPr indent="0" marL="0">
+            <a:pPr marL="0" indent="0">
               <a:buNone/>
             </a:pPr>
             <a:r>
@@ -6761,9 +6477,6 @@
               </a:rPr>
               <a:t>SeaWatch</a:t>
             </a:r>
-            <a:pPr indent="0" marL="0">
-              <a:buNone/>
-            </a:pPr>
             <a:r>
               <a:rPr lang="en-US" sz="900" dirty="0">
                 <a:solidFill>
@@ -6800,7 +6513,7 @@
           <a:bodyPr wrap="square" rtlCol="0" anchor="ctr"/>
           <a:lstStyle/>
           <a:p>
-            <a:pPr algn="r" indent="0" marL="0">
+            <a:pPr marL="0" indent="0" algn="r">
               <a:buNone/>
             </a:pPr>
             <a:r>
@@ -6834,6 +6547,7 @@
         <a:solidFill>
           <a:srgbClr val="FFFFFF"/>
         </a:solidFill>
+        <a:effectLst/>
       </p:bgPr>
     </p:bg>
     <p:spTree>
@@ -6871,11 +6585,11 @@
           <a:bodyPr wrap="square" lIns="0" tIns="0" rIns="0" bIns="0" rtlCol="0" anchor="ctr"/>
           <a:lstStyle/>
           <a:p>
-            <a:pPr indent="0" marL="0">
-              <a:buNone/>
-            </a:pPr>
-            <a:r>
-              <a:rPr lang="en-US" sz="1250" b="1" spc="200" kern="0" dirty="0">
+            <a:pPr marL="0" indent="0">
+              <a:buNone/>
+            </a:pPr>
+            <a:r>
+              <a:rPr lang="en-US" sz="1250" b="1" kern="0" spc="200" dirty="0">
                 <a:solidFill>
                   <a:srgbClr val="0B7A3B"/>
                 </a:solidFill>
@@ -6910,7 +6624,7 @@
           <a:bodyPr wrap="square" lIns="0" tIns="0" rIns="0" bIns="0" rtlCol="0" anchor="ctr"/>
           <a:lstStyle/>
           <a:p>
-            <a:pPr indent="0" marL="0">
+            <a:pPr marL="0" indent="0">
               <a:buNone/>
             </a:pPr>
             <a:r>
@@ -6949,7 +6663,7 @@
           </a:solidFill>
           <a:ln/>
           <a:effectLst>
-            <a:outerShdw sx="100000" sy="100000" kx="0" ky="0" algn="bl" rotWithShape="0" blurRad="101600" dist="38100" dir="5400000">
+            <a:outerShdw blurRad="101600" dist="38100" dir="5400000" algn="bl" rotWithShape="0">
               <a:srgbClr val="0A1626">
                 <a:alpha val="10000"/>
               </a:srgbClr>
@@ -7000,7 +6714,7 @@
           <a:bodyPr wrap="square" lIns="0" tIns="0" rIns="0" bIns="0" rtlCol="0" anchor="ctr"/>
           <a:lstStyle/>
           <a:p>
-            <a:pPr algn="ctr" indent="0" marL="0">
+            <a:pPr marL="0" indent="0" algn="ctr">
               <a:buNone/>
             </a:pPr>
             <a:r>
@@ -7039,7 +6753,7 @@
           <a:bodyPr wrap="square" lIns="0" tIns="0" rIns="0" bIns="0" rtlCol="0" anchor="t"/>
           <a:lstStyle/>
           <a:p>
-            <a:pPr indent="0" marL="0">
+            <a:pPr marL="0" indent="0">
               <a:buNone/>
             </a:pPr>
             <a:r>
@@ -7102,7 +6816,7 @@
           </a:solidFill>
           <a:ln/>
           <a:effectLst>
-            <a:outerShdw sx="100000" sy="100000" kx="0" ky="0" algn="bl" rotWithShape="0" blurRad="101600" dist="38100" dir="5400000">
+            <a:outerShdw blurRad="101600" dist="38100" dir="5400000" algn="bl" rotWithShape="0">
               <a:srgbClr val="0A1626">
                 <a:alpha val="10000"/>
               </a:srgbClr>
@@ -7153,7 +6867,7 @@
           <a:bodyPr wrap="square" lIns="0" tIns="0" rIns="0" bIns="0" rtlCol="0" anchor="ctr"/>
           <a:lstStyle/>
           <a:p>
-            <a:pPr algn="ctr" indent="0" marL="0">
+            <a:pPr marL="0" indent="0" algn="ctr">
               <a:buNone/>
             </a:pPr>
             <a:r>
@@ -7192,7 +6906,7 @@
           <a:bodyPr wrap="square" lIns="0" tIns="0" rIns="0" bIns="0" rtlCol="0" anchor="t"/>
           <a:lstStyle/>
           <a:p>
-            <a:pPr indent="0" marL="0">
+            <a:pPr marL="0" indent="0">
               <a:buNone/>
             </a:pPr>
             <a:r>
@@ -7255,7 +6969,7 @@
           </a:solidFill>
           <a:ln/>
           <a:effectLst>
-            <a:outerShdw sx="100000" sy="100000" kx="0" ky="0" algn="bl" rotWithShape="0" blurRad="101600" dist="38100" dir="5400000">
+            <a:outerShdw blurRad="101600" dist="38100" dir="5400000" algn="bl" rotWithShape="0">
               <a:srgbClr val="0A1626">
                 <a:alpha val="10000"/>
               </a:srgbClr>
@@ -7306,7 +7020,7 @@
           <a:bodyPr wrap="square" lIns="0" tIns="0" rIns="0" bIns="0" rtlCol="0" anchor="ctr"/>
           <a:lstStyle/>
           <a:p>
-            <a:pPr algn="ctr" indent="0" marL="0">
+            <a:pPr marL="0" indent="0" algn="ctr">
               <a:buNone/>
             </a:pPr>
             <a:r>
@@ -7345,7 +7059,7 @@
           <a:bodyPr wrap="square" lIns="0" tIns="0" rIns="0" bIns="0" rtlCol="0" anchor="t"/>
           <a:lstStyle/>
           <a:p>
-            <a:pPr indent="0" marL="0">
+            <a:pPr marL="0" indent="0">
               <a:buNone/>
             </a:pPr>
             <a:r>
@@ -7408,7 +7122,7 @@
           </a:solidFill>
           <a:ln/>
           <a:effectLst>
-            <a:outerShdw sx="100000" sy="100000" kx="0" ky="0" algn="bl" rotWithShape="0" blurRad="101600" dist="38100" dir="5400000">
+            <a:outerShdw blurRad="101600" dist="38100" dir="5400000" algn="bl" rotWithShape="0">
               <a:srgbClr val="0A1626">
                 <a:alpha val="10000"/>
               </a:srgbClr>
@@ -7459,7 +7173,7 @@
           <a:bodyPr wrap="square" lIns="0" tIns="0" rIns="0" bIns="0" rtlCol="0" anchor="ctr"/>
           <a:lstStyle/>
           <a:p>
-            <a:pPr algn="ctr" indent="0" marL="0">
+            <a:pPr marL="0" indent="0" algn="ctr">
               <a:buNone/>
             </a:pPr>
             <a:r>
@@ -7498,7 +7212,7 @@
           <a:bodyPr wrap="square" lIns="0" tIns="0" rIns="0" bIns="0" rtlCol="0" anchor="t"/>
           <a:lstStyle/>
           <a:p>
-            <a:pPr indent="0" marL="0">
+            <a:pPr marL="0" indent="0">
               <a:buNone/>
             </a:pPr>
             <a:r>
@@ -7537,7 +7251,7 @@
           <a:bodyPr wrap="square" lIns="0" tIns="0" rIns="0" bIns="0" rtlCol="0" anchor="ctr"/>
           <a:lstStyle/>
           <a:p>
-            <a:pPr indent="0" marL="0">
+            <a:pPr marL="0" indent="0">
               <a:buNone/>
             </a:pPr>
             <a:r>
@@ -7551,9 +7265,6 @@
               </a:rPr>
               <a:t>SeaWatch</a:t>
             </a:r>
-            <a:pPr indent="0" marL="0">
-              <a:buNone/>
-            </a:pPr>
             <a:r>
               <a:rPr lang="en-US" sz="900" dirty="0">
                 <a:solidFill>
@@ -7590,7 +7301,7 @@
           <a:bodyPr wrap="square" rtlCol="0" anchor="ctr"/>
           <a:lstStyle/>
           <a:p>
-            <a:pPr algn="r" indent="0" marL="0">
+            <a:pPr marL="0" indent="0" algn="r">
               <a:buNone/>
             </a:pPr>
             <a:r>
@@ -7624,6 +7335,7 @@
         <a:solidFill>
           <a:srgbClr val="0A1A2E"/>
         </a:solidFill>
+        <a:effectLst/>
       </p:bgPr>
     </p:bg>
     <p:spTree>
@@ -7642,14 +7354,14 @@
       </p:grpSpPr>
       <p:pic>
         <p:nvPicPr>
-          <p:cNvPr id="2" name="Image 0" descr="crest.png">    </p:cNvPr>
+          <p:cNvPr id="2" name="Image 0" descr="crest.png"/>
           <p:cNvPicPr>
             <a:picLocks noChangeAspect="1"/>
           </p:cNvPicPr>
           <p:nvPr/>
         </p:nvPicPr>
         <p:blipFill>
-          <a:blip r:embed="rId1"/>
+          <a:blip r:embed="rId3"/>
           <a:stretch>
             <a:fillRect/>
           </a:stretch>
@@ -7685,7 +7397,7 @@
           <a:bodyPr wrap="square" lIns="0" tIns="0" rIns="0" bIns="0" rtlCol="0" anchor="ctr"/>
           <a:lstStyle/>
           <a:p>
-            <a:pPr algn="ctr" indent="0" marL="0">
+            <a:pPr marL="0" indent="0" algn="ctr">
               <a:buNone/>
             </a:pPr>
             <a:r>
@@ -7724,7 +7436,7 @@
           <a:bodyPr wrap="square" lIns="0" tIns="0" rIns="0" bIns="0" rtlCol="0" anchor="ctr"/>
           <a:lstStyle/>
           <a:p>
-            <a:pPr algn="ctr" indent="0" marL="0">
+            <a:pPr marL="0" indent="0" algn="ctr">
               <a:buNone/>
             </a:pPr>
             <a:r>
@@ -7786,7 +7498,7 @@
           <a:bodyPr wrap="square" lIns="0" tIns="0" rIns="0" bIns="0" rtlCol="0" anchor="ctr"/>
           <a:lstStyle/>
           <a:p>
-            <a:pPr algn="ctr" indent="0" marL="0">
+            <a:pPr marL="0" indent="0" algn="ctr">
               <a:buNone/>
             </a:pPr>
             <a:r>
@@ -7825,7 +7537,7 @@
           <a:bodyPr wrap="square" lIns="0" tIns="0" rIns="0" bIns="0" rtlCol="0" anchor="ctr"/>
           <a:lstStyle/>
           <a:p>
-            <a:pPr algn="ctr" indent="0" marL="0">
+            <a:pPr marL="0" indent="0" algn="ctr">
               <a:buNone/>
             </a:pPr>
             <a:r>
@@ -7859,6 +7571,7 @@
         <a:solidFill>
           <a:srgbClr val="FFFFFF"/>
         </a:solidFill>
+        <a:effectLst/>
       </p:bgPr>
     </p:bg>
     <p:spTree>
@@ -7896,11 +7609,11 @@
           <a:bodyPr wrap="square" lIns="0" tIns="0" rIns="0" bIns="0" rtlCol="0" anchor="ctr"/>
           <a:lstStyle/>
           <a:p>
-            <a:pPr indent="0" marL="0">
-              <a:buNone/>
-            </a:pPr>
-            <a:r>
-              <a:rPr lang="en-US" sz="1250" b="1" spc="200" kern="0" dirty="0">
+            <a:pPr marL="0" indent="0">
+              <a:buNone/>
+            </a:pPr>
+            <a:r>
+              <a:rPr lang="en-US" sz="1250" b="1" kern="0" spc="200" dirty="0">
                 <a:solidFill>
                   <a:srgbClr val="C8102E"/>
                 </a:solidFill>
@@ -7935,7 +7648,7 @@
           <a:bodyPr wrap="square" lIns="0" tIns="0" rIns="0" bIns="0" rtlCol="0" anchor="ctr"/>
           <a:lstStyle/>
           <a:p>
-            <a:pPr indent="0" marL="0">
+            <a:pPr marL="0" indent="0">
               <a:buNone/>
             </a:pPr>
             <a:r>
@@ -7974,7 +7687,7 @@
           </a:solidFill>
           <a:ln/>
           <a:effectLst>
-            <a:outerShdw sx="100000" sy="100000" kx="0" ky="0" algn="bl" rotWithShape="0" blurRad="101600" dist="38100" dir="5400000">
+            <a:outerShdw blurRad="101600" dist="38100" dir="5400000" algn="bl" rotWithShape="0">
               <a:srgbClr val="0A1626">
                 <a:alpha val="10000"/>
               </a:srgbClr>
@@ -8003,7 +7716,7 @@
           <a:bodyPr wrap="square" lIns="0" tIns="0" rIns="0" bIns="0" rtlCol="0" anchor="ctr"/>
           <a:lstStyle/>
           <a:p>
-            <a:pPr algn="ctr" indent="0" marL="0">
+            <a:pPr marL="0" indent="0" algn="ctr">
               <a:buNone/>
             </a:pPr>
             <a:r>
@@ -8042,7 +7755,7 @@
           <a:bodyPr wrap="square" lIns="0" tIns="0" rIns="0" bIns="0" rtlCol="0" anchor="ctr"/>
           <a:lstStyle/>
           <a:p>
-            <a:pPr algn="ctr" indent="0" marL="0">
+            <a:pPr marL="0" indent="0" algn="ctr">
               <a:buNone/>
             </a:pPr>
             <a:r>
@@ -8059,7 +7772,7 @@
             <a:endParaRPr lang="en-US" sz="1100" dirty="0"/>
           </a:p>
           <a:p>
-            <a:pPr algn="ctr" indent="0" marL="0">
+            <a:pPr marL="0" indent="0" algn="ctr">
               <a:buNone/>
             </a:pPr>
             <a:r>
@@ -8098,7 +7811,7 @@
           </a:solidFill>
           <a:ln/>
           <a:effectLst>
-            <a:outerShdw sx="100000" sy="100000" kx="0" ky="0" algn="bl" rotWithShape="0" blurRad="101600" dist="38100" dir="5400000">
+            <a:outerShdw blurRad="101600" dist="38100" dir="5400000" algn="bl" rotWithShape="0">
               <a:srgbClr val="0A1626">
                 <a:alpha val="10000"/>
               </a:srgbClr>
@@ -8127,7 +7840,7 @@
           <a:bodyPr wrap="square" lIns="0" tIns="0" rIns="0" bIns="0" rtlCol="0" anchor="ctr"/>
           <a:lstStyle/>
           <a:p>
-            <a:pPr algn="ctr" indent="0" marL="0">
+            <a:pPr marL="0" indent="0" algn="ctr">
               <a:buNone/>
             </a:pPr>
             <a:r>
@@ -8166,7 +7879,7 @@
           <a:bodyPr wrap="square" lIns="0" tIns="0" rIns="0" bIns="0" rtlCol="0" anchor="ctr"/>
           <a:lstStyle/>
           <a:p>
-            <a:pPr algn="ctr" indent="0" marL="0">
+            <a:pPr marL="0" indent="0" algn="ctr">
               <a:buNone/>
             </a:pPr>
             <a:r>
@@ -8183,7 +7896,7 @@
             <a:endParaRPr lang="en-US" sz="1100" dirty="0"/>
           </a:p>
           <a:p>
-            <a:pPr algn="ctr" indent="0" marL="0">
+            <a:pPr marL="0" indent="0" algn="ctr">
               <a:buNone/>
             </a:pPr>
             <a:r>
@@ -8222,7 +7935,7 @@
           </a:solidFill>
           <a:ln/>
           <a:effectLst>
-            <a:outerShdw sx="100000" sy="100000" kx="0" ky="0" algn="bl" rotWithShape="0" blurRad="101600" dist="38100" dir="5400000">
+            <a:outerShdw blurRad="101600" dist="38100" dir="5400000" algn="bl" rotWithShape="0">
               <a:srgbClr val="0A1626">
                 <a:alpha val="10000"/>
               </a:srgbClr>
@@ -8251,7 +7964,7 @@
           <a:bodyPr wrap="square" lIns="0" tIns="0" rIns="0" bIns="0" rtlCol="0" anchor="ctr"/>
           <a:lstStyle/>
           <a:p>
-            <a:pPr algn="ctr" indent="0" marL="0">
+            <a:pPr marL="0" indent="0" algn="ctr">
               <a:buNone/>
             </a:pPr>
             <a:r>
@@ -8290,7 +8003,7 @@
           <a:bodyPr wrap="square" lIns="0" tIns="0" rIns="0" bIns="0" rtlCol="0" anchor="ctr"/>
           <a:lstStyle/>
           <a:p>
-            <a:pPr algn="ctr" indent="0" marL="0">
+            <a:pPr marL="0" indent="0" algn="ctr">
               <a:buNone/>
             </a:pPr>
             <a:r>
@@ -8307,7 +8020,7 @@
             <a:endParaRPr lang="en-US" sz="1100" dirty="0"/>
           </a:p>
           <a:p>
-            <a:pPr algn="ctr" indent="0" marL="0">
+            <a:pPr marL="0" indent="0" algn="ctr">
               <a:buNone/>
             </a:pPr>
             <a:r>
@@ -8346,7 +8059,7 @@
           </a:solidFill>
           <a:ln/>
           <a:effectLst>
-            <a:outerShdw sx="100000" sy="100000" kx="0" ky="0" algn="bl" rotWithShape="0" blurRad="101600" dist="38100" dir="5400000">
+            <a:outerShdw blurRad="101600" dist="38100" dir="5400000" algn="bl" rotWithShape="0">
               <a:srgbClr val="0A1626">
                 <a:alpha val="10000"/>
               </a:srgbClr>
@@ -8375,11 +8088,11 @@
           <a:bodyPr wrap="square" lIns="0" tIns="0" rIns="0" bIns="0" rtlCol="0" anchor="ctr"/>
           <a:lstStyle/>
           <a:p>
-            <a:pPr indent="0" marL="0">
-              <a:buNone/>
-            </a:pPr>
-            <a:r>
-              <a:rPr lang="en-US" sz="1250" b="1" spc="150" kern="0" dirty="0">
+            <a:pPr marL="0" indent="0">
+              <a:buNone/>
+            </a:pPr>
+            <a:r>
+              <a:rPr lang="en-US" sz="1250" b="1" kern="0" spc="150" dirty="0">
                 <a:solidFill>
                   <a:srgbClr val="F2C200"/>
                 </a:solidFill>
@@ -8434,7 +8147,7 @@
           <a:bodyPr wrap="square" lIns="0" tIns="0" rIns="0" bIns="0" rtlCol="0" anchor="ctr"/>
           <a:lstStyle/>
           <a:p>
-            <a:pPr indent="0" marL="0">
+            <a:pPr marL="0" indent="0">
               <a:buNone/>
             </a:pPr>
             <a:r>
@@ -8473,7 +8186,7 @@
           <a:bodyPr wrap="square" lIns="0" tIns="0" rIns="0" bIns="0" rtlCol="0" anchor="ctr"/>
           <a:lstStyle/>
           <a:p>
-            <a:pPr indent="0" marL="0">
+            <a:pPr marL="0" indent="0">
               <a:buNone/>
             </a:pPr>
             <a:r>
@@ -8532,7 +8245,7 @@
           <a:bodyPr wrap="square" lIns="0" tIns="0" rIns="0" bIns="0" rtlCol="0" anchor="ctr"/>
           <a:lstStyle/>
           <a:p>
-            <a:pPr indent="0" marL="0">
+            <a:pPr marL="0" indent="0">
               <a:buNone/>
             </a:pPr>
             <a:r>
@@ -8571,7 +8284,7 @@
           <a:bodyPr wrap="square" lIns="0" tIns="0" rIns="0" bIns="0" rtlCol="0" anchor="ctr"/>
           <a:lstStyle/>
           <a:p>
-            <a:pPr indent="0" marL="0">
+            <a:pPr marL="0" indent="0">
               <a:buNone/>
             </a:pPr>
             <a:r>
@@ -8630,7 +8343,7 @@
           <a:bodyPr wrap="square" lIns="0" tIns="0" rIns="0" bIns="0" rtlCol="0" anchor="ctr"/>
           <a:lstStyle/>
           <a:p>
-            <a:pPr indent="0" marL="0">
+            <a:pPr marL="0" indent="0">
               <a:buNone/>
             </a:pPr>
             <a:r>
@@ -8669,7 +8382,7 @@
           <a:bodyPr wrap="square" lIns="0" tIns="0" rIns="0" bIns="0" rtlCol="0" anchor="ctr"/>
           <a:lstStyle/>
           <a:p>
-            <a:pPr indent="0" marL="0">
+            <a:pPr marL="0" indent="0">
               <a:buNone/>
             </a:pPr>
             <a:r>
@@ -8728,7 +8441,7 @@
           <a:bodyPr wrap="square" lIns="0" tIns="0" rIns="0" bIns="0" rtlCol="0" anchor="ctr"/>
           <a:lstStyle/>
           <a:p>
-            <a:pPr indent="0" marL="0">
+            <a:pPr marL="0" indent="0">
               <a:buNone/>
             </a:pPr>
             <a:r>
@@ -8767,7 +8480,7 @@
           <a:bodyPr wrap="square" lIns="0" tIns="0" rIns="0" bIns="0" rtlCol="0" anchor="ctr"/>
           <a:lstStyle/>
           <a:p>
-            <a:pPr indent="0" marL="0">
+            <a:pPr marL="0" indent="0">
               <a:buNone/>
             </a:pPr>
             <a:r>
@@ -8826,7 +8539,7 @@
           <a:bodyPr wrap="square" lIns="0" tIns="0" rIns="0" bIns="0" rtlCol="0" anchor="ctr"/>
           <a:lstStyle/>
           <a:p>
-            <a:pPr indent="0" marL="0">
+            <a:pPr marL="0" indent="0">
               <a:buNone/>
             </a:pPr>
             <a:r>
@@ -8865,7 +8578,7 @@
           <a:bodyPr wrap="square" lIns="0" tIns="0" rIns="0" bIns="0" rtlCol="0" anchor="ctr"/>
           <a:lstStyle/>
           <a:p>
-            <a:pPr indent="0" marL="0">
+            <a:pPr marL="0" indent="0">
               <a:buNone/>
             </a:pPr>
             <a:r>
@@ -8904,7 +8617,7 @@
           <a:bodyPr wrap="square" lIns="0" tIns="0" rIns="0" bIns="0" rtlCol="0" anchor="t"/>
           <a:lstStyle/>
           <a:p>
-            <a:pPr indent="0" marL="0">
+            <a:pPr marL="0" indent="0">
               <a:buNone/>
             </a:pPr>
             <a:r>
@@ -8943,7 +8656,7 @@
           <a:bodyPr wrap="square" lIns="0" tIns="0" rIns="0" bIns="0" rtlCol="0" anchor="ctr"/>
           <a:lstStyle/>
           <a:p>
-            <a:pPr indent="0" marL="0">
+            <a:pPr marL="0" indent="0">
               <a:buNone/>
             </a:pPr>
             <a:r>
@@ -8957,9 +8670,6 @@
               </a:rPr>
               <a:t>SeaWatch</a:t>
             </a:r>
-            <a:pPr indent="0" marL="0">
-              <a:buNone/>
-            </a:pPr>
             <a:r>
               <a:rPr lang="en-US" sz="900" dirty="0">
                 <a:solidFill>
@@ -8996,7 +8706,7 @@
           <a:bodyPr wrap="square" rtlCol="0" anchor="ctr"/>
           <a:lstStyle/>
           <a:p>
-            <a:pPr algn="r" indent="0" marL="0">
+            <a:pPr marL="0" indent="0" algn="r">
               <a:buNone/>
             </a:pPr>
             <a:r>
@@ -9030,6 +8740,7 @@
         <a:solidFill>
           <a:srgbClr val="FFFFFF"/>
         </a:solidFill>
+        <a:effectLst/>
       </p:bgPr>
     </p:bg>
     <p:spTree>
@@ -9067,11 +8778,11 @@
           <a:bodyPr wrap="square" lIns="0" tIns="0" rIns="0" bIns="0" rtlCol="0" anchor="ctr"/>
           <a:lstStyle/>
           <a:p>
-            <a:pPr indent="0" marL="0">
-              <a:buNone/>
-            </a:pPr>
-            <a:r>
-              <a:rPr lang="en-US" sz="1250" b="1" spc="200" kern="0" dirty="0">
+            <a:pPr marL="0" indent="0">
+              <a:buNone/>
+            </a:pPr>
+            <a:r>
+              <a:rPr lang="en-US" sz="1250" b="1" kern="0" spc="200" dirty="0">
                 <a:solidFill>
                   <a:srgbClr val="0B7A3B"/>
                 </a:solidFill>
@@ -9106,7 +8817,7 @@
           <a:bodyPr wrap="square" lIns="0" tIns="0" rIns="0" bIns="0" rtlCol="0" anchor="ctr"/>
           <a:lstStyle/>
           <a:p>
-            <a:pPr indent="0" marL="0">
+            <a:pPr marL="0" indent="0">
               <a:buNone/>
             </a:pPr>
             <a:r>
@@ -9145,7 +8856,7 @@
           <a:bodyPr wrap="square" lIns="0" tIns="0" rIns="0" bIns="0" rtlCol="0" anchor="ctr"/>
           <a:lstStyle/>
           <a:p>
-            <a:pPr indent="0" marL="0">
+            <a:pPr marL="0" indent="0">
               <a:buNone/>
             </a:pPr>
             <a:r>
@@ -9184,7 +8895,7 @@
           </a:solidFill>
           <a:ln/>
           <a:effectLst>
-            <a:outerShdw sx="100000" sy="100000" kx="0" ky="0" algn="bl" rotWithShape="0" blurRad="101600" dist="38100" dir="5400000">
+            <a:outerShdw blurRad="101600" dist="38100" dir="5400000" algn="bl" rotWithShape="0">
               <a:srgbClr val="0A1626">
                 <a:alpha val="10000"/>
               </a:srgbClr>
@@ -9233,7 +8944,7 @@
           <a:bodyPr wrap="square" lIns="0" tIns="0" rIns="0" bIns="0" rtlCol="0" anchor="ctr"/>
           <a:lstStyle/>
           <a:p>
-            <a:pPr algn="ctr" indent="0" marL="0">
+            <a:pPr marL="0" indent="0" algn="ctr">
               <a:buNone/>
             </a:pPr>
             <a:r>
@@ -9272,7 +8983,7 @@
           <a:bodyPr wrap="square" lIns="0" tIns="0" rIns="0" bIns="0" rtlCol="0" anchor="ctr"/>
           <a:lstStyle/>
           <a:p>
-            <a:pPr indent="0" marL="0">
+            <a:pPr marL="0" indent="0">
               <a:buNone/>
             </a:pPr>
             <a:r>
@@ -9311,7 +9022,7 @@
           <a:bodyPr wrap="square" lIns="0" tIns="0" rIns="0" bIns="0" rtlCol="0" anchor="t"/>
           <a:lstStyle/>
           <a:p>
-            <a:pPr indent="0" marL="0">
+            <a:pPr marL="0" indent="0">
               <a:buNone/>
             </a:pPr>
             <a:r>
@@ -9350,7 +9061,7 @@
           </a:solidFill>
           <a:ln/>
           <a:effectLst>
-            <a:outerShdw sx="100000" sy="100000" kx="0" ky="0" algn="bl" rotWithShape="0" blurRad="101600" dist="38100" dir="5400000">
+            <a:outerShdw blurRad="101600" dist="38100" dir="5400000" algn="bl" rotWithShape="0">
               <a:srgbClr val="0A1626">
                 <a:alpha val="10000"/>
               </a:srgbClr>
@@ -9399,7 +9110,7 @@
           <a:bodyPr wrap="square" lIns="0" tIns="0" rIns="0" bIns="0" rtlCol="0" anchor="ctr"/>
           <a:lstStyle/>
           <a:p>
-            <a:pPr algn="ctr" indent="0" marL="0">
+            <a:pPr marL="0" indent="0" algn="ctr">
               <a:buNone/>
             </a:pPr>
             <a:r>
@@ -9438,7 +9149,7 @@
           <a:bodyPr wrap="square" lIns="0" tIns="0" rIns="0" bIns="0" rtlCol="0" anchor="ctr"/>
           <a:lstStyle/>
           <a:p>
-            <a:pPr indent="0" marL="0">
+            <a:pPr marL="0" indent="0">
               <a:buNone/>
             </a:pPr>
             <a:r>
@@ -9477,7 +9188,7 @@
           <a:bodyPr wrap="square" lIns="0" tIns="0" rIns="0" bIns="0" rtlCol="0" anchor="t"/>
           <a:lstStyle/>
           <a:p>
-            <a:pPr indent="0" marL="0">
+            <a:pPr marL="0" indent="0">
               <a:buNone/>
             </a:pPr>
             <a:r>
@@ -9516,7 +9227,7 @@
           </a:solidFill>
           <a:ln/>
           <a:effectLst>
-            <a:outerShdw sx="100000" sy="100000" kx="0" ky="0" algn="bl" rotWithShape="0" blurRad="101600" dist="38100" dir="5400000">
+            <a:outerShdw blurRad="101600" dist="38100" dir="5400000" algn="bl" rotWithShape="0">
               <a:srgbClr val="0A1626">
                 <a:alpha val="10000"/>
               </a:srgbClr>
@@ -9565,7 +9276,7 @@
           <a:bodyPr wrap="square" lIns="0" tIns="0" rIns="0" bIns="0" rtlCol="0" anchor="ctr"/>
           <a:lstStyle/>
           <a:p>
-            <a:pPr algn="ctr" indent="0" marL="0">
+            <a:pPr marL="0" indent="0" algn="ctr">
               <a:buNone/>
             </a:pPr>
             <a:r>
@@ -9604,7 +9315,7 @@
           <a:bodyPr wrap="square" lIns="0" tIns="0" rIns="0" bIns="0" rtlCol="0" anchor="ctr"/>
           <a:lstStyle/>
           <a:p>
-            <a:pPr indent="0" marL="0">
+            <a:pPr marL="0" indent="0">
               <a:buNone/>
             </a:pPr>
             <a:r>
@@ -9643,7 +9354,7 @@
           <a:bodyPr wrap="square" lIns="0" tIns="0" rIns="0" bIns="0" rtlCol="0" anchor="t"/>
           <a:lstStyle/>
           <a:p>
-            <a:pPr indent="0" marL="0">
+            <a:pPr marL="0" indent="0">
               <a:buNone/>
             </a:pPr>
             <a:r>
@@ -9682,7 +9393,7 @@
           </a:solidFill>
           <a:ln/>
           <a:effectLst>
-            <a:outerShdw sx="100000" sy="100000" kx="0" ky="0" algn="bl" rotWithShape="0" blurRad="101600" dist="38100" dir="5400000">
+            <a:outerShdw blurRad="101600" dist="38100" dir="5400000" algn="bl" rotWithShape="0">
               <a:srgbClr val="0A1626">
                 <a:alpha val="10000"/>
               </a:srgbClr>
@@ -9731,7 +9442,7 @@
           <a:bodyPr wrap="square" lIns="0" tIns="0" rIns="0" bIns="0" rtlCol="0" anchor="ctr"/>
           <a:lstStyle/>
           <a:p>
-            <a:pPr algn="ctr" indent="0" marL="0">
+            <a:pPr marL="0" indent="0" algn="ctr">
               <a:buNone/>
             </a:pPr>
             <a:r>
@@ -9770,7 +9481,7 @@
           <a:bodyPr wrap="square" lIns="0" tIns="0" rIns="0" bIns="0" rtlCol="0" anchor="ctr"/>
           <a:lstStyle/>
           <a:p>
-            <a:pPr indent="0" marL="0">
+            <a:pPr marL="0" indent="0">
               <a:buNone/>
             </a:pPr>
             <a:r>
@@ -9809,7 +9520,7 @@
           <a:bodyPr wrap="square" lIns="0" tIns="0" rIns="0" bIns="0" rtlCol="0" anchor="t"/>
           <a:lstStyle/>
           <a:p>
-            <a:pPr indent="0" marL="0">
+            <a:pPr marL="0" indent="0">
               <a:buNone/>
             </a:pPr>
             <a:r>
@@ -9848,7 +9559,7 @@
           <a:bodyPr wrap="square" lIns="0" tIns="0" rIns="0" bIns="0" rtlCol="0" anchor="ctr"/>
           <a:lstStyle/>
           <a:p>
-            <a:pPr indent="0" marL="0">
+            <a:pPr marL="0" indent="0">
               <a:buNone/>
             </a:pPr>
             <a:r>
@@ -9862,9 +9573,6 @@
               </a:rPr>
               <a:t>SeaWatch</a:t>
             </a:r>
-            <a:pPr indent="0" marL="0">
-              <a:buNone/>
-            </a:pPr>
             <a:r>
               <a:rPr lang="en-US" sz="900" dirty="0">
                 <a:solidFill>
@@ -9901,7 +9609,7 @@
           <a:bodyPr wrap="square" rtlCol="0" anchor="ctr"/>
           <a:lstStyle/>
           <a:p>
-            <a:pPr algn="r" indent="0" marL="0">
+            <a:pPr marL="0" indent="0" algn="r">
               <a:buNone/>
             </a:pPr>
             <a:r>
@@ -9935,6 +9643,7 @@
         <a:solidFill>
           <a:srgbClr val="FFFFFF"/>
         </a:solidFill>
+        <a:effectLst/>
       </p:bgPr>
     </p:bg>
     <p:spTree>
@@ -9972,11 +9681,11 @@
           <a:bodyPr wrap="square" lIns="0" tIns="0" rIns="0" bIns="0" rtlCol="0" anchor="ctr"/>
           <a:lstStyle/>
           <a:p>
-            <a:pPr indent="0" marL="0">
-              <a:buNone/>
-            </a:pPr>
-            <a:r>
-              <a:rPr lang="en-US" sz="1250" b="1" spc="200" kern="0" dirty="0">
+            <a:pPr marL="0" indent="0">
+              <a:buNone/>
+            </a:pPr>
+            <a:r>
+              <a:rPr lang="en-US" sz="1250" b="1" kern="0" spc="200" dirty="0">
                 <a:solidFill>
                   <a:srgbClr val="2E6FB0"/>
                 </a:solidFill>
@@ -10011,7 +9720,7 @@
           <a:bodyPr wrap="square" lIns="0" tIns="0" rIns="0" bIns="0" rtlCol="0" anchor="ctr"/>
           <a:lstStyle/>
           <a:p>
-            <a:pPr indent="0" marL="0">
+            <a:pPr marL="0" indent="0">
               <a:buNone/>
             </a:pPr>
             <a:r>
@@ -10050,7 +9759,7 @@
           </a:solidFill>
           <a:ln/>
           <a:effectLst>
-            <a:outerShdw sx="100000" sy="100000" kx="0" ky="0" algn="bl" rotWithShape="0" blurRad="101600" dist="38100" dir="5400000">
+            <a:outerShdw blurRad="101600" dist="38100" dir="5400000" algn="bl" rotWithShape="0">
               <a:srgbClr val="0A1626">
                 <a:alpha val="10000"/>
               </a:srgbClr>
@@ -10079,7 +9788,7 @@
           <a:bodyPr wrap="square" lIns="0" tIns="0" rIns="0" bIns="0" rtlCol="0" anchor="ctr"/>
           <a:lstStyle/>
           <a:p>
-            <a:pPr indent="0" marL="0">
+            <a:pPr marL="0" indent="0">
               <a:buNone/>
             </a:pPr>
             <a:r>
@@ -10118,7 +9827,7 @@
           <a:bodyPr wrap="square" lIns="0" tIns="0" rIns="0" bIns="0" rtlCol="0" anchor="ctr"/>
           <a:lstStyle/>
           <a:p>
-            <a:pPr indent="0" marL="0">
+            <a:pPr marL="0" indent="0">
               <a:buNone/>
             </a:pPr>
             <a:r>
@@ -10135,7 +9844,7 @@
             <a:endParaRPr lang="en-US" sz="1050" dirty="0"/>
           </a:p>
           <a:p>
-            <a:pPr indent="0" marL="0">
+            <a:pPr marL="0" indent="0">
               <a:buNone/>
             </a:pPr>
             <a:r>
@@ -10174,7 +9883,7 @@
           </a:solidFill>
           <a:ln/>
           <a:effectLst>
-            <a:outerShdw sx="100000" sy="100000" kx="0" ky="0" algn="bl" rotWithShape="0" blurRad="101600" dist="38100" dir="5400000">
+            <a:outerShdw blurRad="101600" dist="38100" dir="5400000" algn="bl" rotWithShape="0">
               <a:srgbClr val="0A1626">
                 <a:alpha val="10000"/>
               </a:srgbClr>
@@ -10203,7 +9912,7 @@
           <a:bodyPr wrap="square" lIns="0" tIns="0" rIns="0" bIns="0" rtlCol="0" anchor="ctr"/>
           <a:lstStyle/>
           <a:p>
-            <a:pPr indent="0" marL="0">
+            <a:pPr marL="0" indent="0">
               <a:buNone/>
             </a:pPr>
             <a:r>
@@ -10242,7 +9951,7 @@
           <a:bodyPr wrap="square" lIns="0" tIns="0" rIns="0" bIns="0" rtlCol="0" anchor="ctr"/>
           <a:lstStyle/>
           <a:p>
-            <a:pPr indent="0" marL="0">
+            <a:pPr marL="0" indent="0">
               <a:buNone/>
             </a:pPr>
             <a:r>
@@ -10259,7 +9968,7 @@
             <a:endParaRPr lang="en-US" sz="1050" dirty="0"/>
           </a:p>
           <a:p>
-            <a:pPr indent="0" marL="0">
+            <a:pPr marL="0" indent="0">
               <a:buNone/>
             </a:pPr>
             <a:r>
@@ -10298,7 +10007,7 @@
           </a:solidFill>
           <a:ln/>
           <a:effectLst>
-            <a:outerShdw sx="100000" sy="100000" kx="0" ky="0" algn="bl" rotWithShape="0" blurRad="101600" dist="38100" dir="5400000">
+            <a:outerShdw blurRad="101600" dist="38100" dir="5400000" algn="bl" rotWithShape="0">
               <a:srgbClr val="0A1626">
                 <a:alpha val="10000"/>
               </a:srgbClr>
@@ -10327,7 +10036,7 @@
           <a:bodyPr wrap="square" lIns="0" tIns="0" rIns="0" bIns="0" rtlCol="0" anchor="ctr"/>
           <a:lstStyle/>
           <a:p>
-            <a:pPr indent="0" marL="0">
+            <a:pPr marL="0" indent="0">
               <a:buNone/>
             </a:pPr>
             <a:r>
@@ -10366,7 +10075,7 @@
           <a:bodyPr wrap="square" lIns="0" tIns="0" rIns="0" bIns="0" rtlCol="0" anchor="ctr"/>
           <a:lstStyle/>
           <a:p>
-            <a:pPr indent="0" marL="0">
+            <a:pPr marL="0" indent="0">
               <a:buNone/>
             </a:pPr>
             <a:r>
@@ -10383,7 +10092,7 @@
             <a:endParaRPr lang="en-US" sz="1050" dirty="0"/>
           </a:p>
           <a:p>
-            <a:pPr indent="0" marL="0">
+            <a:pPr marL="0" indent="0">
               <a:buNone/>
             </a:pPr>
             <a:r>
@@ -10422,7 +10131,7 @@
           </a:solidFill>
           <a:ln/>
           <a:effectLst>
-            <a:outerShdw sx="100000" sy="100000" kx="0" ky="0" algn="bl" rotWithShape="0" blurRad="101600" dist="38100" dir="5400000">
+            <a:outerShdw blurRad="101600" dist="38100" dir="5400000" algn="bl" rotWithShape="0">
               <a:srgbClr val="0A1626">
                 <a:alpha val="10000"/>
               </a:srgbClr>
@@ -10451,7 +10160,7 @@
           <a:bodyPr wrap="square" lIns="0" tIns="0" rIns="0" bIns="0" rtlCol="0" anchor="ctr"/>
           <a:lstStyle/>
           <a:p>
-            <a:pPr algn="ctr" indent="0" marL="0">
+            <a:pPr marL="0" indent="0" algn="ctr">
               <a:buNone/>
             </a:pPr>
             <a:r>
@@ -10490,7 +10199,7 @@
           <a:bodyPr wrap="square" lIns="0" tIns="0" rIns="0" bIns="0" rtlCol="0" anchor="ctr"/>
           <a:lstStyle/>
           <a:p>
-            <a:pPr algn="ctr" indent="0" marL="0">
+            <a:pPr marL="0" indent="0" algn="ctr">
               <a:buNone/>
             </a:pPr>
             <a:r>
@@ -10507,7 +10216,7 @@
             <a:endParaRPr lang="en-US" sz="1200" dirty="0"/>
           </a:p>
           <a:p>
-            <a:pPr algn="ctr" indent="0" marL="0">
+            <a:pPr marL="0" indent="0" algn="ctr">
               <a:buNone/>
             </a:pPr>
             <a:r>
@@ -10642,7 +10351,7 @@
           </a:solidFill>
           <a:ln/>
           <a:effectLst>
-            <a:outerShdw sx="100000" sy="100000" kx="0" ky="0" algn="bl" rotWithShape="0" blurRad="101600" dist="38100" dir="5400000">
+            <a:outerShdw blurRad="101600" dist="38100" dir="5400000" algn="bl" rotWithShape="0">
               <a:srgbClr val="0A1626">
                 <a:alpha val="10000"/>
               </a:srgbClr>
@@ -10671,11 +10380,11 @@
           <a:bodyPr wrap="square" lIns="0" tIns="0" rIns="0" bIns="0" rtlCol="0" anchor="ctr"/>
           <a:lstStyle/>
           <a:p>
-            <a:pPr indent="0" marL="0">
-              <a:buNone/>
-            </a:pPr>
-            <a:r>
-              <a:rPr lang="en-US" sz="1250" b="1" spc="100" kern="0" dirty="0">
+            <a:pPr marL="0" indent="0">
+              <a:buNone/>
+            </a:pPr>
+            <a:r>
+              <a:rPr lang="en-US" sz="1250" b="1" kern="0" spc="100" dirty="0">
                 <a:solidFill>
                   <a:srgbClr val="13263B"/>
                 </a:solidFill>
@@ -10730,7 +10439,7 @@
           <a:bodyPr wrap="square" lIns="0" tIns="0" rIns="0" bIns="0" rtlCol="0" anchor="ctr"/>
           <a:lstStyle/>
           <a:p>
-            <a:pPr indent="0" marL="0">
+            <a:pPr marL="0" indent="0">
               <a:buNone/>
             </a:pPr>
             <a:r>
@@ -10789,7 +10498,7 @@
           <a:bodyPr wrap="square" lIns="0" tIns="0" rIns="0" bIns="0" rtlCol="0" anchor="ctr"/>
           <a:lstStyle/>
           <a:p>
-            <a:pPr indent="0" marL="0">
+            <a:pPr marL="0" indent="0">
               <a:buNone/>
             </a:pPr>
             <a:r>
@@ -10848,7 +10557,7 @@
           <a:bodyPr wrap="square" lIns="0" tIns="0" rIns="0" bIns="0" rtlCol="0" anchor="ctr"/>
           <a:lstStyle/>
           <a:p>
-            <a:pPr indent="0" marL="0">
+            <a:pPr marL="0" indent="0">
               <a:buNone/>
             </a:pPr>
             <a:r>
@@ -10907,7 +10616,7 @@
           <a:bodyPr wrap="square" lIns="0" tIns="0" rIns="0" bIns="0" rtlCol="0" anchor="ctr"/>
           <a:lstStyle/>
           <a:p>
-            <a:pPr indent="0" marL="0">
+            <a:pPr marL="0" indent="0">
               <a:buNone/>
             </a:pPr>
             <a:r>
@@ -10966,7 +10675,7 @@
           <a:bodyPr wrap="square" lIns="0" tIns="0" rIns="0" bIns="0" rtlCol="0" anchor="ctr"/>
           <a:lstStyle/>
           <a:p>
-            <a:pPr indent="0" marL="0">
+            <a:pPr marL="0" indent="0">
               <a:buNone/>
             </a:pPr>
             <a:r>
@@ -11005,7 +10714,7 @@
           <a:bodyPr wrap="square" lIns="0" tIns="0" rIns="0" bIns="0" rtlCol="0" anchor="ctr"/>
           <a:lstStyle/>
           <a:p>
-            <a:pPr indent="0" marL="0">
+            <a:pPr marL="0" indent="0">
               <a:buNone/>
             </a:pPr>
             <a:r>
@@ -11044,7 +10753,7 @@
           <a:bodyPr wrap="square" lIns="0" tIns="0" rIns="0" bIns="0" rtlCol="0" anchor="ctr"/>
           <a:lstStyle/>
           <a:p>
-            <a:pPr indent="0" marL="0">
+            <a:pPr marL="0" indent="0">
               <a:buNone/>
             </a:pPr>
             <a:r>
@@ -11058,9 +10767,6 @@
               </a:rPr>
               <a:t>SeaWatch</a:t>
             </a:r>
-            <a:pPr indent="0" marL="0">
-              <a:buNone/>
-            </a:pPr>
             <a:r>
               <a:rPr lang="en-US" sz="900" dirty="0">
                 <a:solidFill>
@@ -11097,7 +10803,7 @@
           <a:bodyPr wrap="square" rtlCol="0" anchor="ctr"/>
           <a:lstStyle/>
           <a:p>
-            <a:pPr algn="r" indent="0" marL="0">
+            <a:pPr marL="0" indent="0" algn="r">
               <a:buNone/>
             </a:pPr>
             <a:r>
@@ -11131,6 +10837,7 @@
         <a:solidFill>
           <a:srgbClr val="FFFFFF"/>
         </a:solidFill>
+        <a:effectLst/>
       </p:bgPr>
     </p:bg>
     <p:spTree>
@@ -11168,11 +10875,11 @@
           <a:bodyPr wrap="square" lIns="0" tIns="0" rIns="0" bIns="0" rtlCol="0" anchor="ctr"/>
           <a:lstStyle/>
           <a:p>
-            <a:pPr indent="0" marL="0">
-              <a:buNone/>
-            </a:pPr>
-            <a:r>
-              <a:rPr lang="en-US" sz="1250" b="1" spc="200" kern="0" dirty="0">
+            <a:pPr marL="0" indent="0">
+              <a:buNone/>
+            </a:pPr>
+            <a:r>
+              <a:rPr lang="en-US" sz="1250" b="1" kern="0" spc="200" dirty="0">
                 <a:solidFill>
                   <a:srgbClr val="2E6FB0"/>
                 </a:solidFill>
@@ -11207,7 +10914,7 @@
           <a:bodyPr wrap="square" lIns="0" tIns="0" rIns="0" bIns="0" rtlCol="0" anchor="ctr"/>
           <a:lstStyle/>
           <a:p>
-            <a:pPr indent="0" marL="0">
+            <a:pPr marL="0" indent="0">
               <a:buNone/>
             </a:pPr>
             <a:r>
@@ -11246,7 +10953,7 @@
           </a:solidFill>
           <a:ln/>
           <a:effectLst>
-            <a:outerShdw sx="100000" sy="100000" kx="0" ky="0" algn="bl" rotWithShape="0" blurRad="101600" dist="38100" dir="5400000">
+            <a:outerShdw blurRad="101600" dist="38100" dir="5400000" algn="bl" rotWithShape="0">
               <a:srgbClr val="0A1626">
                 <a:alpha val="10000"/>
               </a:srgbClr>
@@ -11275,7 +10982,7 @@
           <a:bodyPr wrap="square" lIns="0" tIns="0" rIns="0" bIns="0" rtlCol="0" anchor="ctr"/>
           <a:lstStyle/>
           <a:p>
-            <a:pPr indent="0" marL="0">
+            <a:pPr marL="0" indent="0">
               <a:buNone/>
             </a:pPr>
             <a:r>
@@ -11314,7 +11021,7 @@
           <a:bodyPr wrap="square" lIns="0" tIns="0" rIns="0" bIns="0" rtlCol="0" anchor="t"/>
           <a:lstStyle/>
           <a:p>
-            <a:pPr indent="0" marL="0">
+            <a:pPr marL="0" indent="0">
               <a:buNone/>
             </a:pPr>
             <a:r>
@@ -11353,7 +11060,7 @@
           </a:solidFill>
           <a:ln/>
           <a:effectLst>
-            <a:outerShdw sx="100000" sy="100000" kx="0" ky="0" algn="bl" rotWithShape="0" blurRad="101600" dist="38100" dir="5400000">
+            <a:outerShdw blurRad="101600" dist="38100" dir="5400000" algn="bl" rotWithShape="0">
               <a:srgbClr val="0A1626">
                 <a:alpha val="10000"/>
               </a:srgbClr>
@@ -11382,7 +11089,7 @@
           <a:bodyPr wrap="square" lIns="0" tIns="0" rIns="0" bIns="0" rtlCol="0" anchor="ctr"/>
           <a:lstStyle/>
           <a:p>
-            <a:pPr indent="0" marL="0">
+            <a:pPr marL="0" indent="0">
               <a:buNone/>
             </a:pPr>
             <a:r>
@@ -11421,7 +11128,7 @@
           <a:bodyPr wrap="square" lIns="0" tIns="0" rIns="0" bIns="0" rtlCol="0" anchor="t"/>
           <a:lstStyle/>
           <a:p>
-            <a:pPr indent="0" marL="0">
+            <a:pPr marL="0" indent="0">
               <a:buNone/>
             </a:pPr>
             <a:r>
@@ -11460,7 +11167,7 @@
           </a:solidFill>
           <a:ln/>
           <a:effectLst>
-            <a:outerShdw sx="100000" sy="100000" kx="0" ky="0" algn="bl" rotWithShape="0" blurRad="101600" dist="38100" dir="5400000">
+            <a:outerShdw blurRad="101600" dist="38100" dir="5400000" algn="bl" rotWithShape="0">
               <a:srgbClr val="0A1626">
                 <a:alpha val="10000"/>
               </a:srgbClr>
@@ -11489,7 +11196,7 @@
           <a:bodyPr wrap="square" lIns="0" tIns="0" rIns="0" bIns="0" rtlCol="0" anchor="ctr"/>
           <a:lstStyle/>
           <a:p>
-            <a:pPr indent="0" marL="0">
+            <a:pPr marL="0" indent="0">
               <a:buNone/>
             </a:pPr>
             <a:r>
@@ -11528,7 +11235,7 @@
           <a:bodyPr wrap="square" lIns="0" tIns="0" rIns="0" bIns="0" rtlCol="0" anchor="t"/>
           <a:lstStyle/>
           <a:p>
-            <a:pPr indent="0" marL="0">
+            <a:pPr marL="0" indent="0">
               <a:buNone/>
             </a:pPr>
             <a:r>
@@ -11567,7 +11274,7 @@
           </a:solidFill>
           <a:ln/>
           <a:effectLst>
-            <a:outerShdw sx="100000" sy="100000" kx="0" ky="0" algn="bl" rotWithShape="0" blurRad="101600" dist="38100" dir="5400000">
+            <a:outerShdw blurRad="101600" dist="38100" dir="5400000" algn="bl" rotWithShape="0">
               <a:srgbClr val="0A1626">
                 <a:alpha val="10000"/>
               </a:srgbClr>
@@ -11596,7 +11303,7 @@
           <a:bodyPr wrap="square" lIns="0" tIns="0" rIns="0" bIns="0" rtlCol="0" anchor="ctr"/>
           <a:lstStyle/>
           <a:p>
-            <a:pPr indent="0" marL="0">
+            <a:pPr marL="0" indent="0">
               <a:buNone/>
             </a:pPr>
             <a:r>
@@ -11635,7 +11342,7 @@
           <a:bodyPr wrap="square" lIns="0" tIns="0" rIns="0" bIns="0" rtlCol="0" anchor="t"/>
           <a:lstStyle/>
           <a:p>
-            <a:pPr indent="0" marL="0">
+            <a:pPr marL="0" indent="0">
               <a:buNone/>
             </a:pPr>
             <a:r>
@@ -11674,7 +11381,7 @@
           <a:bodyPr wrap="square" lIns="0" tIns="0" rIns="0" bIns="0" rtlCol="0" anchor="ctr"/>
           <a:lstStyle/>
           <a:p>
-            <a:pPr indent="0" marL="0">
+            <a:pPr marL="0" indent="0">
               <a:buNone/>
             </a:pPr>
             <a:r>
@@ -11688,9 +11395,6 @@
               </a:rPr>
               <a:t>SeaWatch</a:t>
             </a:r>
-            <a:pPr indent="0" marL="0">
-              <a:buNone/>
-            </a:pPr>
             <a:r>
               <a:rPr lang="en-US" sz="900" dirty="0">
                 <a:solidFill>
@@ -11727,7 +11431,7 @@
           <a:bodyPr wrap="square" rtlCol="0" anchor="ctr"/>
           <a:lstStyle/>
           <a:p>
-            <a:pPr algn="r" indent="0" marL="0">
+            <a:pPr marL="0" indent="0" algn="r">
               <a:buNone/>
             </a:pPr>
             <a:r>
@@ -11761,6 +11465,7 @@
         <a:solidFill>
           <a:srgbClr val="0A1A2E"/>
         </a:solidFill>
+        <a:effectLst/>
       </p:bgPr>
     </p:bg>
     <p:spTree>
@@ -11798,11 +11503,11 @@
           <a:bodyPr wrap="square" lIns="0" tIns="0" rIns="0" bIns="0" rtlCol="0" anchor="ctr"/>
           <a:lstStyle/>
           <a:p>
-            <a:pPr indent="0" marL="0">
-              <a:buNone/>
-            </a:pPr>
-            <a:r>
-              <a:rPr lang="en-US" sz="1250" b="1" spc="200" kern="0" dirty="0">
+            <a:pPr marL="0" indent="0">
+              <a:buNone/>
+            </a:pPr>
+            <a:r>
+              <a:rPr lang="en-US" sz="1250" b="1" kern="0" spc="200" dirty="0">
                 <a:solidFill>
                   <a:srgbClr val="F2C200"/>
                 </a:solidFill>
@@ -11837,7 +11542,7 @@
           <a:bodyPr wrap="square" lIns="0" tIns="0" rIns="0" bIns="0" rtlCol="0" anchor="ctr"/>
           <a:lstStyle/>
           <a:p>
-            <a:pPr indent="0" marL="0">
+            <a:pPr marL="0" indent="0">
               <a:buNone/>
             </a:pPr>
             <a:r>
@@ -11876,7 +11581,7 @@
           <a:bodyPr wrap="square" lIns="0" tIns="0" rIns="0" bIns="0" rtlCol="0" anchor="ctr"/>
           <a:lstStyle/>
           <a:p>
-            <a:pPr indent="0" marL="0">
+            <a:pPr marL="0" indent="0">
               <a:buNone/>
             </a:pPr>
             <a:r>
@@ -11915,7 +11620,7 @@
           </a:solidFill>
           <a:ln/>
           <a:effectLst>
-            <a:outerShdw sx="100000" sy="100000" kx="0" ky="0" algn="bl" rotWithShape="0" blurRad="101600" dist="38100" dir="5400000">
+            <a:outerShdw blurRad="101600" dist="38100" dir="5400000" algn="bl" rotWithShape="0">
               <a:srgbClr val="0A1626">
                 <a:alpha val="10000"/>
               </a:srgbClr>
@@ -11964,7 +11669,7 @@
           <a:bodyPr wrap="square" lIns="0" tIns="0" rIns="0" bIns="0" rtlCol="0" anchor="ctr"/>
           <a:lstStyle/>
           <a:p>
-            <a:pPr algn="ctr" indent="0" marL="0">
+            <a:pPr marL="0" indent="0" algn="ctr">
               <a:buNone/>
             </a:pPr>
             <a:r>
@@ -12003,7 +11708,7 @@
           <a:bodyPr wrap="square" lIns="0" tIns="0" rIns="0" bIns="0" rtlCol="0" anchor="ctr"/>
           <a:lstStyle/>
           <a:p>
-            <a:pPr algn="ctr" indent="0" marL="0">
+            <a:pPr marL="0" indent="0" algn="ctr">
               <a:buNone/>
             </a:pPr>
             <a:r>
@@ -12042,7 +11747,7 @@
           <a:bodyPr wrap="square" lIns="0" tIns="0" rIns="0" bIns="0" rtlCol="0" anchor="t"/>
           <a:lstStyle/>
           <a:p>
-            <a:pPr algn="ctr" indent="0" marL="0">
+            <a:pPr marL="0" indent="0" algn="ctr">
               <a:buNone/>
             </a:pPr>
             <a:r>
@@ -12081,7 +11786,7 @@
           </a:solidFill>
           <a:ln/>
           <a:effectLst>
-            <a:outerShdw sx="100000" sy="100000" kx="0" ky="0" algn="bl" rotWithShape="0" blurRad="101600" dist="38100" dir="5400000">
+            <a:outerShdw blurRad="101600" dist="38100" dir="5400000" algn="bl" rotWithShape="0">
               <a:srgbClr val="0A1626">
                 <a:alpha val="10000"/>
               </a:srgbClr>
@@ -12130,7 +11835,7 @@
           <a:bodyPr wrap="square" lIns="0" tIns="0" rIns="0" bIns="0" rtlCol="0" anchor="ctr"/>
           <a:lstStyle/>
           <a:p>
-            <a:pPr algn="ctr" indent="0" marL="0">
+            <a:pPr marL="0" indent="0" algn="ctr">
               <a:buNone/>
             </a:pPr>
             <a:r>
@@ -12169,7 +11874,7 @@
           <a:bodyPr wrap="square" lIns="0" tIns="0" rIns="0" bIns="0" rtlCol="0" anchor="ctr"/>
           <a:lstStyle/>
           <a:p>
-            <a:pPr algn="ctr" indent="0" marL="0">
+            <a:pPr marL="0" indent="0" algn="ctr">
               <a:buNone/>
             </a:pPr>
             <a:r>
@@ -12208,7 +11913,7 @@
           <a:bodyPr wrap="square" lIns="0" tIns="0" rIns="0" bIns="0" rtlCol="0" anchor="t"/>
           <a:lstStyle/>
           <a:p>
-            <a:pPr algn="ctr" indent="0" marL="0">
+            <a:pPr marL="0" indent="0" algn="ctr">
               <a:buNone/>
             </a:pPr>
             <a:r>
@@ -12247,7 +11952,7 @@
           </a:solidFill>
           <a:ln/>
           <a:effectLst>
-            <a:outerShdw sx="100000" sy="100000" kx="0" ky="0" algn="bl" rotWithShape="0" blurRad="101600" dist="38100" dir="5400000">
+            <a:outerShdw blurRad="101600" dist="38100" dir="5400000" algn="bl" rotWithShape="0">
               <a:srgbClr val="0A1626">
                 <a:alpha val="10000"/>
               </a:srgbClr>
@@ -12296,7 +12001,7 @@
           <a:bodyPr wrap="square" lIns="0" tIns="0" rIns="0" bIns="0" rtlCol="0" anchor="ctr"/>
           <a:lstStyle/>
           <a:p>
-            <a:pPr algn="ctr" indent="0" marL="0">
+            <a:pPr marL="0" indent="0" algn="ctr">
               <a:buNone/>
             </a:pPr>
             <a:r>
@@ -12335,7 +12040,7 @@
           <a:bodyPr wrap="square" lIns="0" tIns="0" rIns="0" bIns="0" rtlCol="0" anchor="ctr"/>
           <a:lstStyle/>
           <a:p>
-            <a:pPr algn="ctr" indent="0" marL="0">
+            <a:pPr marL="0" indent="0" algn="ctr">
               <a:buNone/>
             </a:pPr>
             <a:r>
@@ -12374,7 +12079,7 @@
           <a:bodyPr wrap="square" lIns="0" tIns="0" rIns="0" bIns="0" rtlCol="0" anchor="t"/>
           <a:lstStyle/>
           <a:p>
-            <a:pPr algn="ctr" indent="0" marL="0">
+            <a:pPr marL="0" indent="0" algn="ctr">
               <a:buNone/>
             </a:pPr>
             <a:r>
@@ -12413,7 +12118,7 @@
           </a:solidFill>
           <a:ln/>
           <a:effectLst>
-            <a:outerShdw sx="100000" sy="100000" kx="0" ky="0" algn="bl" rotWithShape="0" blurRad="101600" dist="38100" dir="5400000">
+            <a:outerShdw blurRad="101600" dist="38100" dir="5400000" algn="bl" rotWithShape="0">
               <a:srgbClr val="0A1626">
                 <a:alpha val="10000"/>
               </a:srgbClr>
@@ -12462,7 +12167,7 @@
           <a:bodyPr wrap="square" lIns="0" tIns="0" rIns="0" bIns="0" rtlCol="0" anchor="ctr"/>
           <a:lstStyle/>
           <a:p>
-            <a:pPr algn="ctr" indent="0" marL="0">
+            <a:pPr marL="0" indent="0" algn="ctr">
               <a:buNone/>
             </a:pPr>
             <a:r>
@@ -12501,7 +12206,7 @@
           <a:bodyPr wrap="square" lIns="0" tIns="0" rIns="0" bIns="0" rtlCol="0" anchor="ctr"/>
           <a:lstStyle/>
           <a:p>
-            <a:pPr algn="ctr" indent="0" marL="0">
+            <a:pPr marL="0" indent="0" algn="ctr">
               <a:buNone/>
             </a:pPr>
             <a:r>
@@ -12540,7 +12245,7 @@
           <a:bodyPr wrap="square" lIns="0" tIns="0" rIns="0" bIns="0" rtlCol="0" anchor="t"/>
           <a:lstStyle/>
           <a:p>
-            <a:pPr algn="ctr" indent="0" marL="0">
+            <a:pPr marL="0" indent="0" algn="ctr">
               <a:buNone/>
             </a:pPr>
             <a:r>
@@ -12579,7 +12284,7 @@
           </a:solidFill>
           <a:ln/>
           <a:effectLst>
-            <a:outerShdw sx="100000" sy="100000" kx="0" ky="0" algn="bl" rotWithShape="0" blurRad="101600" dist="38100" dir="5400000">
+            <a:outerShdw blurRad="101600" dist="38100" dir="5400000" algn="bl" rotWithShape="0">
               <a:srgbClr val="0A1626">
                 <a:alpha val="10000"/>
               </a:srgbClr>
@@ -12628,7 +12333,7 @@
           <a:bodyPr wrap="square" lIns="0" tIns="0" rIns="0" bIns="0" rtlCol="0" anchor="ctr"/>
           <a:lstStyle/>
           <a:p>
-            <a:pPr algn="ctr" indent="0" marL="0">
+            <a:pPr marL="0" indent="0" algn="ctr">
               <a:buNone/>
             </a:pPr>
             <a:r>
@@ -12667,7 +12372,7 @@
           <a:bodyPr wrap="square" lIns="0" tIns="0" rIns="0" bIns="0" rtlCol="0" anchor="ctr"/>
           <a:lstStyle/>
           <a:p>
-            <a:pPr algn="ctr" indent="0" marL="0">
+            <a:pPr marL="0" indent="0" algn="ctr">
               <a:buNone/>
             </a:pPr>
             <a:r>
@@ -12706,7 +12411,7 @@
           <a:bodyPr wrap="square" lIns="0" tIns="0" rIns="0" bIns="0" rtlCol="0" anchor="t"/>
           <a:lstStyle/>
           <a:p>
-            <a:pPr algn="ctr" indent="0" marL="0">
+            <a:pPr marL="0" indent="0" algn="ctr">
               <a:buNone/>
             </a:pPr>
             <a:r>
@@ -12745,7 +12450,7 @@
           <a:bodyPr wrap="square" lIns="0" tIns="0" rIns="0" bIns="0" rtlCol="0" anchor="ctr"/>
           <a:lstStyle/>
           <a:p>
-            <a:pPr indent="0" marL="0">
+            <a:pPr marL="0" indent="0">
               <a:buNone/>
             </a:pPr>
             <a:r>
@@ -12784,7 +12489,7 @@
           <a:bodyPr wrap="square" lIns="0" tIns="0" rIns="0" bIns="0" rtlCol="0" anchor="ctr"/>
           <a:lstStyle/>
           <a:p>
-            <a:pPr indent="0" marL="0">
+            <a:pPr marL="0" indent="0">
               <a:buNone/>
             </a:pPr>
             <a:r>
@@ -12798,9 +12503,6 @@
               </a:rPr>
               <a:t>SeaWatch</a:t>
             </a:r>
-            <a:pPr indent="0" marL="0">
-              <a:buNone/>
-            </a:pPr>
             <a:r>
               <a:rPr lang="en-US" sz="900" dirty="0">
                 <a:solidFill>
@@ -12837,7 +12539,7 @@
           <a:bodyPr wrap="square" rtlCol="0" anchor="ctr"/>
           <a:lstStyle/>
           <a:p>
-            <a:pPr algn="r" indent="0" marL="0">
+            <a:pPr marL="0" indent="0" algn="r">
               <a:buNone/>
             </a:pPr>
             <a:r>
@@ -12871,6 +12573,7 @@
         <a:solidFill>
           <a:srgbClr val="FFFFFF"/>
         </a:solidFill>
+        <a:effectLst/>
       </p:bgPr>
     </p:bg>
     <p:spTree>
@@ -12908,11 +12611,11 @@
           <a:bodyPr wrap="square" lIns="0" tIns="0" rIns="0" bIns="0" rtlCol="0" anchor="ctr"/>
           <a:lstStyle/>
           <a:p>
-            <a:pPr indent="0" marL="0">
-              <a:buNone/>
-            </a:pPr>
-            <a:r>
-              <a:rPr lang="en-US" sz="1250" b="1" spc="200" kern="0" dirty="0">
+            <a:pPr marL="0" indent="0">
+              <a:buNone/>
+            </a:pPr>
+            <a:r>
+              <a:rPr lang="en-US" sz="1250" b="1" kern="0" spc="200" dirty="0">
                 <a:solidFill>
                   <a:srgbClr val="C8102E"/>
                 </a:solidFill>
@@ -12947,7 +12650,7 @@
           <a:bodyPr wrap="square" lIns="0" tIns="0" rIns="0" bIns="0" rtlCol="0" anchor="ctr"/>
           <a:lstStyle/>
           <a:p>
-            <a:pPr indent="0" marL="0">
+            <a:pPr marL="0" indent="0">
               <a:buNone/>
             </a:pPr>
             <a:r>
@@ -12974,23 +12677,41 @@
           <p:nvPr>
             <p:extLst>
               <p:ext uri="{D42A27DB-BD31-4B8C-83A1-F6EECF244321}">
-                <p14:modId xmlns:p14="http://schemas.microsoft.com/office/powerpoint/2010/main" val="1579011935"/>
+                <p14:modId xmlns:p14="http://schemas.microsoft.com/office/powerpoint/2010/main" val="2844133648"/>
               </p:ext>
             </p:extLst>
           </p:nvPr>
         </p:nvGraphicFramePr>
         <p:xfrm>
           <a:off x="548640" y="1783080"/>
-          <a:ext cx="11091672" cy="914400"/>
+          <a:ext cx="11091672" cy="3931920"/>
         </p:xfrm>
         <a:graphic>
           <a:graphicData uri="http://schemas.openxmlformats.org/drawingml/2006/table">
             <a:tbl>
               <a:tblPr/>
               <a:tblGrid>
-                <a:gridCol w="2743200"/>
-                <a:gridCol w="6062472"/>
-                <a:gridCol w="2286000"/>
+                <a:gridCol w="2743200">
+                  <a:extLst>
+                    <a:ext uri="{9D8B030D-6E8A-4147-A177-3AD203B41FA5}">
+                      <a16:colId xmlns:a16="http://schemas.microsoft.com/office/drawing/2014/main" val="20000"/>
+                    </a:ext>
+                  </a:extLst>
+                </a:gridCol>
+                <a:gridCol w="6062472">
+                  <a:extLst>
+                    <a:ext uri="{9D8B030D-6E8A-4147-A177-3AD203B41FA5}">
+                      <a16:colId xmlns:a16="http://schemas.microsoft.com/office/drawing/2014/main" val="20001"/>
+                    </a:ext>
+                  </a:extLst>
+                </a:gridCol>
+                <a:gridCol w="2286000">
+                  <a:extLst>
+                    <a:ext uri="{9D8B030D-6E8A-4147-A177-3AD203B41FA5}">
+                      <a16:colId xmlns:a16="http://schemas.microsoft.com/office/drawing/2014/main" val="20002"/>
+                    </a:ext>
+                  </a:extLst>
+                </a:gridCol>
               </a:tblGrid>
               <a:tr h="384048">
                 <a:tc>
@@ -12998,7 +12719,7 @@
                     <a:bodyPr/>
                     <a:lstStyle/>
                     <a:p>
-                      <a:pPr algn="l" indent="0" marL="0">
+                      <a:pPr marL="0" indent="0" algn="l">
                         <a:buNone/>
                       </a:pPr>
                       <a:r>
@@ -13066,7 +12787,7 @@
                     <a:bodyPr/>
                     <a:lstStyle/>
                     <a:p>
-                      <a:pPr algn="l" indent="0" marL="0">
+                      <a:pPr marL="0" indent="0" algn="l">
                         <a:buNone/>
                       </a:pPr>
                       <a:r>
@@ -13134,7 +12855,7 @@
                     <a:bodyPr/>
                     <a:lstStyle/>
                     <a:p>
-                      <a:pPr algn="l" indent="0" marL="0">
+                      <a:pPr marL="0" indent="0" algn="l">
                         <a:buNone/>
                       </a:pPr>
                       <a:r>
@@ -13197,6 +12918,11 @@
                     </a:solidFill>
                   </a:tcPr>
                 </a:tc>
+                <a:extLst>
+                  <a:ext uri="{0D108BD9-81ED-4DB2-BD59-A6C34878D82A}">
+                    <a16:rowId xmlns:a16="http://schemas.microsoft.com/office/drawing/2014/main" val="10000"/>
+                  </a:ext>
+                </a:extLst>
               </a:tr>
               <a:tr h="566928">
                 <a:tc>
@@ -13204,7 +12930,7 @@
                     <a:bodyPr/>
                     <a:lstStyle/>
                     <a:p>
-                      <a:pPr algn="l" indent="0" marL="0">
+                      <a:pPr marL="0" indent="0" algn="l">
                         <a:buNone/>
                       </a:pPr>
                       <a:r>
@@ -13272,7 +12998,7 @@
                     <a:bodyPr/>
                     <a:lstStyle/>
                     <a:p>
-                      <a:pPr algn="l" indent="0" marL="0">
+                      <a:pPr marL="0" indent="0" algn="l">
                         <a:buNone/>
                       </a:pPr>
                       <a:r>
@@ -13340,7 +13066,7 @@
                     <a:bodyPr/>
                     <a:lstStyle/>
                     <a:p>
-                      <a:pPr algn="l" indent="0" marL="0">
+                      <a:pPr marL="0" indent="0" algn="l">
                         <a:buNone/>
                       </a:pPr>
                       <a:r>
@@ -13403,6 +13129,11 @@
                     </a:solidFill>
                   </a:tcPr>
                 </a:tc>
+                <a:extLst>
+                  <a:ext uri="{0D108BD9-81ED-4DB2-BD59-A6C34878D82A}">
+                    <a16:rowId xmlns:a16="http://schemas.microsoft.com/office/drawing/2014/main" val="10001"/>
+                  </a:ext>
+                </a:extLst>
               </a:tr>
               <a:tr h="566928">
                 <a:tc>
@@ -13410,7 +13141,7 @@
                     <a:bodyPr/>
                     <a:lstStyle/>
                     <a:p>
-                      <a:pPr algn="l" indent="0" marL="0">
+                      <a:pPr marL="0" indent="0" algn="l">
                         <a:buNone/>
                       </a:pPr>
                       <a:r>
@@ -13478,7 +13209,7 @@
                     <a:bodyPr/>
                     <a:lstStyle/>
                     <a:p>
-                      <a:pPr algn="l" indent="0" marL="0">
+                      <a:pPr marL="0" indent="0" algn="l">
                         <a:buNone/>
                       </a:pPr>
                       <a:r>
@@ -13546,7 +13277,7 @@
                     <a:bodyPr/>
                     <a:lstStyle/>
                     <a:p>
-                      <a:pPr algn="l" indent="0" marL="0">
+                      <a:pPr marL="0" indent="0" algn="l">
                         <a:buNone/>
                       </a:pPr>
                       <a:r>
@@ -13609,6 +13340,11 @@
                     </a:solidFill>
                   </a:tcPr>
                 </a:tc>
+                <a:extLst>
+                  <a:ext uri="{0D108BD9-81ED-4DB2-BD59-A6C34878D82A}">
+                    <a16:rowId xmlns:a16="http://schemas.microsoft.com/office/drawing/2014/main" val="10002"/>
+                  </a:ext>
+                </a:extLst>
               </a:tr>
               <a:tr h="566928">
                 <a:tc>
@@ -13616,7 +13352,7 @@
                     <a:bodyPr/>
                     <a:lstStyle/>
                     <a:p>
-                      <a:pPr algn="l" indent="0" marL="0">
+                      <a:pPr marL="0" indent="0" algn="l">
                         <a:buNone/>
                       </a:pPr>
                       <a:r>
@@ -13684,7 +13420,7 @@
                     <a:bodyPr/>
                     <a:lstStyle/>
                     <a:p>
-                      <a:pPr algn="l" indent="0" marL="0">
+                      <a:pPr marL="0" indent="0" algn="l">
                         <a:buNone/>
                       </a:pPr>
                       <a:r>
@@ -13752,7 +13488,7 @@
                     <a:bodyPr/>
                     <a:lstStyle/>
                     <a:p>
-                      <a:pPr algn="l" indent="0" marL="0">
+                      <a:pPr marL="0" indent="0" algn="l">
                         <a:buNone/>
                       </a:pPr>
                       <a:r>
@@ -13815,6 +13551,11 @@
                     </a:solidFill>
                   </a:tcPr>
                 </a:tc>
+                <a:extLst>
+                  <a:ext uri="{0D108BD9-81ED-4DB2-BD59-A6C34878D82A}">
+                    <a16:rowId xmlns:a16="http://schemas.microsoft.com/office/drawing/2014/main" val="10003"/>
+                  </a:ext>
+                </a:extLst>
               </a:tr>
               <a:tr h="713232">
                 <a:tc>
@@ -13822,7 +13563,7 @@
                     <a:bodyPr/>
                     <a:lstStyle/>
                     <a:p>
-                      <a:pPr algn="l" indent="0" marL="0">
+                      <a:pPr marL="0" indent="0" algn="l">
                         <a:buNone/>
                       </a:pPr>
                       <a:r>
@@ -13890,7 +13631,7 @@
                     <a:bodyPr/>
                     <a:lstStyle/>
                     <a:p>
-                      <a:pPr algn="l" indent="0" marL="0">
+                      <a:pPr marL="0" indent="0" algn="l">
                         <a:buNone/>
                       </a:pPr>
                       <a:r>
@@ -13958,7 +13699,7 @@
                     <a:bodyPr/>
                     <a:lstStyle/>
                     <a:p>
-                      <a:pPr algn="l" indent="0" marL="0">
+                      <a:pPr marL="0" indent="0" algn="l">
                         <a:buNone/>
                       </a:pPr>
                       <a:r>
@@ -14021,6 +13762,11 @@
                     </a:solidFill>
                   </a:tcPr>
                 </a:tc>
+                <a:extLst>
+                  <a:ext uri="{0D108BD9-81ED-4DB2-BD59-A6C34878D82A}">
+                    <a16:rowId xmlns:a16="http://schemas.microsoft.com/office/drawing/2014/main" val="10004"/>
+                  </a:ext>
+                </a:extLst>
               </a:tr>
               <a:tr h="566928">
                 <a:tc>
@@ -14028,7 +13774,7 @@
                     <a:bodyPr/>
                     <a:lstStyle/>
                     <a:p>
-                      <a:pPr algn="l" indent="0" marL="0">
+                      <a:pPr marL="0" indent="0" algn="l">
                         <a:buNone/>
                       </a:pPr>
                       <a:r>
@@ -14096,7 +13842,7 @@
                     <a:bodyPr/>
                     <a:lstStyle/>
                     <a:p>
-                      <a:pPr algn="l" indent="0" marL="0">
+                      <a:pPr marL="0" indent="0" algn="l">
                         <a:buNone/>
                       </a:pPr>
                       <a:r>
@@ -14108,7 +13854,62 @@
                           <a:ea typeface="Calibri" pitchFamily="34" charset="-122"/>
                           <a:cs typeface="Calibri" pitchFamily="34" charset="-120"/>
                         </a:rPr>
-                        <a:t>Two slow (&lt;3 kn) vessels within 0.6 NM offshore, outside a designated anchorage</a:t>
+                        <a:t>Two slow </a:t>
+                      </a:r>
+                      <a:r>
+                        <a:rPr lang="en-US" sz="1150" dirty="0" smtClean="0">
+                          <a:solidFill>
+                            <a:srgbClr val="5C6E82"/>
+                          </a:solidFill>
+                          <a:latin typeface="Calibri" pitchFamily="34" charset="0"/>
+                          <a:ea typeface="Calibri" pitchFamily="34" charset="-122"/>
+                          <a:cs typeface="Calibri" pitchFamily="34" charset="-120"/>
+                        </a:rPr>
+                        <a:t>(&lt;1.2 </a:t>
+                      </a:r>
+                      <a:r>
+                        <a:rPr lang="en-US" sz="1150" dirty="0">
+                          <a:solidFill>
+                            <a:srgbClr val="5C6E82"/>
+                          </a:solidFill>
+                          <a:latin typeface="Calibri" pitchFamily="34" charset="0"/>
+                          <a:ea typeface="Calibri" pitchFamily="34" charset="-122"/>
+                          <a:cs typeface="Calibri" pitchFamily="34" charset="-120"/>
+                        </a:rPr>
+                        <a:t>kn) vessels </a:t>
+                      </a:r>
+                      <a:r>
+                        <a:rPr lang="en-US" sz="1150">
+                          <a:solidFill>
+                            <a:srgbClr val="5C6E82"/>
+                          </a:solidFill>
+                          <a:latin typeface="Calibri" pitchFamily="34" charset="0"/>
+                          <a:ea typeface="Calibri" pitchFamily="34" charset="-122"/>
+                          <a:cs typeface="Calibri" pitchFamily="34" charset="-120"/>
+                        </a:rPr>
+                        <a:t>within </a:t>
+                      </a:r>
+                      <a:r>
+                        <a:rPr lang="en-US" sz="1150" smtClean="0">
+                          <a:solidFill>
+                            <a:srgbClr val="5C6E82"/>
+                          </a:solidFill>
+                          <a:latin typeface="Calibri" pitchFamily="34" charset="0"/>
+                          <a:ea typeface="Calibri" pitchFamily="34" charset="-122"/>
+                          <a:cs typeface="Calibri" pitchFamily="34" charset="-120"/>
+                        </a:rPr>
+                        <a:t>0.3 </a:t>
+                      </a:r>
+                      <a:r>
+                        <a:rPr lang="en-US" sz="1150" dirty="0">
+                          <a:solidFill>
+                            <a:srgbClr val="5C6E82"/>
+                          </a:solidFill>
+                          <a:latin typeface="Calibri" pitchFamily="34" charset="0"/>
+                          <a:ea typeface="Calibri" pitchFamily="34" charset="-122"/>
+                          <a:cs typeface="Calibri" pitchFamily="34" charset="-120"/>
+                        </a:rPr>
+                        <a:t>NM offshore, outside a designated anchorage</a:t>
                       </a:r>
                       <a:endParaRPr lang="en-US" sz="1150" dirty="0">
                         <a:latin typeface="Calibri" charset="0"/>
@@ -14164,7 +13965,7 @@
                     <a:bodyPr/>
                     <a:lstStyle/>
                     <a:p>
-                      <a:pPr algn="l" indent="0" marL="0">
+                      <a:pPr marL="0" indent="0" algn="l">
                         <a:buNone/>
                       </a:pPr>
                       <a:r>
@@ -14227,6 +14028,11 @@
                     </a:solidFill>
                   </a:tcPr>
                 </a:tc>
+                <a:extLst>
+                  <a:ext uri="{0D108BD9-81ED-4DB2-BD59-A6C34878D82A}">
+                    <a16:rowId xmlns:a16="http://schemas.microsoft.com/office/drawing/2014/main" val="10005"/>
+                  </a:ext>
+                </a:extLst>
               </a:tr>
               <a:tr h="566928">
                 <a:tc>
@@ -14234,7 +14040,7 @@
                     <a:bodyPr/>
                     <a:lstStyle/>
                     <a:p>
-                      <a:pPr algn="l" indent="0" marL="0">
+                      <a:pPr marL="0" indent="0" algn="l">
                         <a:buNone/>
                       </a:pPr>
                       <a:r>
@@ -14302,7 +14108,7 @@
                     <a:bodyPr/>
                     <a:lstStyle/>
                     <a:p>
-                      <a:pPr algn="l" indent="0" marL="0">
+                      <a:pPr marL="0" indent="0" algn="l">
                         <a:buNone/>
                       </a:pPr>
                       <a:r>
@@ -14370,7 +14176,7 @@
                     <a:bodyPr/>
                     <a:lstStyle/>
                     <a:p>
-                      <a:pPr algn="l" indent="0" marL="0">
+                      <a:pPr marL="0" indent="0" algn="l">
                         <a:buNone/>
                       </a:pPr>
                       <a:r>
@@ -14433,6 +14239,11 @@
                     </a:solidFill>
                   </a:tcPr>
                 </a:tc>
+                <a:extLst>
+                  <a:ext uri="{0D108BD9-81ED-4DB2-BD59-A6C34878D82A}">
+                    <a16:rowId xmlns:a16="http://schemas.microsoft.com/office/drawing/2014/main" val="10006"/>
+                  </a:ext>
+                </a:extLst>
               </a:tr>
             </a:tbl>
           </a:graphicData>
@@ -14459,7 +14270,7 @@
           <a:bodyPr wrap="square" lIns="0" tIns="0" rIns="0" bIns="0" rtlCol="0" anchor="ctr"/>
           <a:lstStyle/>
           <a:p>
-            <a:pPr indent="0" marL="0">
+            <a:pPr marL="0" indent="0">
               <a:buNone/>
             </a:pPr>
             <a:r>
@@ -14498,7 +14309,7 @@
           <a:bodyPr wrap="square" lIns="0" tIns="0" rIns="0" bIns="0" rtlCol="0" anchor="ctr"/>
           <a:lstStyle/>
           <a:p>
-            <a:pPr indent="0" marL="0">
+            <a:pPr marL="0" indent="0">
               <a:buNone/>
             </a:pPr>
             <a:r>
@@ -14512,9 +14323,6 @@
               </a:rPr>
               <a:t>SeaWatch</a:t>
             </a:r>
-            <a:pPr indent="0" marL="0">
-              <a:buNone/>
-            </a:pPr>
             <a:r>
               <a:rPr lang="en-US" sz="900" dirty="0">
                 <a:solidFill>
@@ -14551,7 +14359,7 @@
           <a:bodyPr wrap="square" rtlCol="0" anchor="ctr"/>
           <a:lstStyle/>
           <a:p>
-            <a:pPr algn="r" indent="0" marL="0">
+            <a:pPr marL="0" indent="0" algn="r">
               <a:buNone/>
             </a:pPr>
             <a:r>
@@ -14585,6 +14393,7 @@
         <a:solidFill>
           <a:srgbClr val="FFFFFF"/>
         </a:solidFill>
+        <a:effectLst/>
       </p:bgPr>
     </p:bg>
     <p:spTree>
@@ -14622,11 +14431,11 @@
           <a:bodyPr wrap="square" lIns="0" tIns="0" rIns="0" bIns="0" rtlCol="0" anchor="ctr"/>
           <a:lstStyle/>
           <a:p>
-            <a:pPr indent="0" marL="0">
-              <a:buNone/>
-            </a:pPr>
-            <a:r>
-              <a:rPr lang="en-US" sz="1250" b="1" spc="200" kern="0" dirty="0">
+            <a:pPr marL="0" indent="0">
+              <a:buNone/>
+            </a:pPr>
+            <a:r>
+              <a:rPr lang="en-US" sz="1250" b="1" kern="0" spc="200" dirty="0">
                 <a:solidFill>
                   <a:srgbClr val="F2C200"/>
                 </a:solidFill>
@@ -14661,7 +14470,7 @@
           <a:bodyPr wrap="square" lIns="0" tIns="0" rIns="0" bIns="0" rtlCol="0" anchor="ctr"/>
           <a:lstStyle/>
           <a:p>
-            <a:pPr indent="0" marL="0">
+            <a:pPr marL="0" indent="0">
               <a:buNone/>
             </a:pPr>
             <a:r>
@@ -14700,7 +14509,7 @@
           <a:bodyPr wrap="square" lIns="0" tIns="0" rIns="0" bIns="0" rtlCol="0" anchor="ctr"/>
           <a:lstStyle/>
           <a:p>
-            <a:pPr indent="0" marL="0">
+            <a:pPr marL="0" indent="0">
               <a:buNone/>
             </a:pPr>
             <a:r>
@@ -14739,7 +14548,7 @@
           </a:solidFill>
           <a:ln/>
           <a:effectLst>
-            <a:outerShdw sx="100000" sy="100000" kx="0" ky="0" algn="bl" rotWithShape="0" blurRad="101600" dist="38100" dir="5400000">
+            <a:outerShdw blurRad="101600" dist="38100" dir="5400000" algn="bl" rotWithShape="0">
               <a:srgbClr val="0A1626">
                 <a:alpha val="10000"/>
               </a:srgbClr>
@@ -14768,11 +14577,11 @@
           <a:bodyPr wrap="square" lIns="0" tIns="0" rIns="0" bIns="0" rtlCol="0" anchor="ctr"/>
           <a:lstStyle/>
           <a:p>
-            <a:pPr indent="0" marL="0">
-              <a:buNone/>
-            </a:pPr>
-            <a:r>
-              <a:rPr lang="en-US" sz="1250" b="1" spc="100" kern="0" dirty="0">
+            <a:pPr marL="0" indent="0">
+              <a:buNone/>
+            </a:pPr>
+            <a:r>
+              <a:rPr lang="en-US" sz="1250" b="1" kern="0" spc="100" dirty="0">
                 <a:solidFill>
                   <a:srgbClr val="13263B"/>
                 </a:solidFill>
@@ -14807,7 +14616,7 @@
           <a:bodyPr wrap="square" lIns="0" tIns="0" rIns="0" bIns="0" rtlCol="0" anchor="ctr"/>
           <a:lstStyle/>
           <a:p>
-            <a:pPr indent="0" marL="0">
+            <a:pPr marL="0" indent="0">
               <a:buNone/>
             </a:pPr>
             <a:r>
@@ -14846,7 +14655,7 @@
           <a:bodyPr wrap="square" lIns="0" tIns="0" rIns="0" bIns="0" rtlCol="0" anchor="ctr"/>
           <a:lstStyle/>
           <a:p>
-            <a:pPr algn="r" indent="0" marL="0">
+            <a:pPr marL="0" indent="0" algn="r">
               <a:buNone/>
             </a:pPr>
             <a:r>
@@ -14885,7 +14694,7 @@
           <a:bodyPr wrap="square" lIns="0" tIns="0" rIns="0" bIns="0" rtlCol="0" anchor="ctr"/>
           <a:lstStyle/>
           <a:p>
-            <a:pPr indent="0" marL="0">
+            <a:pPr marL="0" indent="0">
               <a:buNone/>
             </a:pPr>
             <a:r>
@@ -14924,7 +14733,7 @@
           <a:bodyPr wrap="square" lIns="0" tIns="0" rIns="0" bIns="0" rtlCol="0" anchor="ctr"/>
           <a:lstStyle/>
           <a:p>
-            <a:pPr algn="r" indent="0" marL="0">
+            <a:pPr marL="0" indent="0" algn="r">
               <a:buNone/>
             </a:pPr>
             <a:r>
@@ -14963,7 +14772,7 @@
           <a:bodyPr wrap="square" lIns="0" tIns="0" rIns="0" bIns="0" rtlCol="0" anchor="ctr"/>
           <a:lstStyle/>
           <a:p>
-            <a:pPr indent="0" marL="0">
+            <a:pPr marL="0" indent="0">
               <a:buNone/>
             </a:pPr>
             <a:r>
@@ -15002,7 +14811,7 @@
           <a:bodyPr wrap="square" lIns="0" tIns="0" rIns="0" bIns="0" rtlCol="0" anchor="ctr"/>
           <a:lstStyle/>
           <a:p>
-            <a:pPr algn="r" indent="0" marL="0">
+            <a:pPr marL="0" indent="0" algn="r">
               <a:buNone/>
             </a:pPr>
             <a:r>
@@ -15041,7 +14850,7 @@
           <a:bodyPr wrap="square" lIns="0" tIns="0" rIns="0" bIns="0" rtlCol="0" anchor="ctr"/>
           <a:lstStyle/>
           <a:p>
-            <a:pPr indent="0" marL="0">
+            <a:pPr marL="0" indent="0">
               <a:buNone/>
             </a:pPr>
             <a:r>
@@ -15080,7 +14889,7 @@
           <a:bodyPr wrap="square" lIns="0" tIns="0" rIns="0" bIns="0" rtlCol="0" anchor="ctr"/>
           <a:lstStyle/>
           <a:p>
-            <a:pPr algn="r" indent="0" marL="0">
+            <a:pPr marL="0" indent="0" algn="r">
               <a:buNone/>
             </a:pPr>
             <a:r>
@@ -15119,7 +14928,7 @@
           <a:bodyPr wrap="square" lIns="0" tIns="0" rIns="0" bIns="0" rtlCol="0" anchor="ctr"/>
           <a:lstStyle/>
           <a:p>
-            <a:pPr indent="0" marL="0">
+            <a:pPr marL="0" indent="0">
               <a:buNone/>
             </a:pPr>
             <a:r>
@@ -15158,7 +14967,7 @@
           <a:bodyPr wrap="square" lIns="0" tIns="0" rIns="0" bIns="0" rtlCol="0" anchor="ctr"/>
           <a:lstStyle/>
           <a:p>
-            <a:pPr algn="r" indent="0" marL="0">
+            <a:pPr marL="0" indent="0" algn="r">
               <a:buNone/>
             </a:pPr>
             <a:r>
@@ -15197,7 +15006,7 @@
           <a:bodyPr wrap="square" lIns="0" tIns="0" rIns="0" bIns="0" rtlCol="0" anchor="ctr"/>
           <a:lstStyle/>
           <a:p>
-            <a:pPr indent="0" marL="0">
+            <a:pPr marL="0" indent="0">
               <a:buNone/>
             </a:pPr>
             <a:r>
@@ -15236,7 +15045,7 @@
           <a:bodyPr wrap="square" lIns="0" tIns="0" rIns="0" bIns="0" rtlCol="0" anchor="ctr"/>
           <a:lstStyle/>
           <a:p>
-            <a:pPr algn="r" indent="0" marL="0">
+            <a:pPr marL="0" indent="0" algn="r">
               <a:buNone/>
             </a:pPr>
             <a:r>
@@ -15275,11 +15084,11 @@
           <a:bodyPr wrap="square" lIns="0" tIns="0" rIns="0" bIns="0" rtlCol="0" anchor="ctr"/>
           <a:lstStyle/>
           <a:p>
-            <a:pPr indent="0" marL="0">
-              <a:buNone/>
-            </a:pPr>
-            <a:r>
-              <a:rPr lang="en-US" sz="1250" b="1" spc="100" kern="0" dirty="0">
+            <a:pPr marL="0" indent="0">
+              <a:buNone/>
+            </a:pPr>
+            <a:r>
+              <a:rPr lang="en-US" sz="1250" b="1" kern="0" spc="100" dirty="0">
                 <a:solidFill>
                   <a:srgbClr val="13263B"/>
                 </a:solidFill>
@@ -15314,7 +15123,7 @@
           </a:solidFill>
           <a:ln/>
           <a:effectLst>
-            <a:outerShdw sx="100000" sy="100000" kx="0" ky="0" algn="bl" rotWithShape="0" blurRad="101600" dist="38100" dir="5400000">
+            <a:outerShdw blurRad="101600" dist="38100" dir="5400000" algn="bl" rotWithShape="0">
               <a:srgbClr val="0A1626">
                 <a:alpha val="10000"/>
               </a:srgbClr>
@@ -15363,7 +15172,7 @@
           <a:bodyPr wrap="square" lIns="0" tIns="0" rIns="0" bIns="0" rtlCol="0" anchor="ctr"/>
           <a:lstStyle/>
           <a:p>
-            <a:pPr indent="0" marL="0">
+            <a:pPr marL="0" indent="0">
               <a:buNone/>
             </a:pPr>
             <a:r>
@@ -15402,7 +15211,7 @@
           <a:bodyPr wrap="square" lIns="0" tIns="0" rIns="0" bIns="0" rtlCol="0" anchor="ctr"/>
           <a:lstStyle/>
           <a:p>
-            <a:pPr algn="r" indent="0" marL="0">
+            <a:pPr marL="0" indent="0" algn="r">
               <a:buNone/>
             </a:pPr>
             <a:r>
@@ -15441,7 +15250,7 @@
           </a:solidFill>
           <a:ln/>
           <a:effectLst>
-            <a:outerShdw sx="100000" sy="100000" kx="0" ky="0" algn="bl" rotWithShape="0" blurRad="101600" dist="38100" dir="5400000">
+            <a:outerShdw blurRad="101600" dist="38100" dir="5400000" algn="bl" rotWithShape="0">
               <a:srgbClr val="0A1626">
                 <a:alpha val="10000"/>
               </a:srgbClr>
@@ -15490,7 +15299,7 @@
           <a:bodyPr wrap="square" lIns="0" tIns="0" rIns="0" bIns="0" rtlCol="0" anchor="ctr"/>
           <a:lstStyle/>
           <a:p>
-            <a:pPr indent="0" marL="0">
+            <a:pPr marL="0" indent="0">
               <a:buNone/>
             </a:pPr>
             <a:r>
@@ -15529,7 +15338,7 @@
           <a:bodyPr wrap="square" lIns="0" tIns="0" rIns="0" bIns="0" rtlCol="0" anchor="ctr"/>
           <a:lstStyle/>
           <a:p>
-            <a:pPr algn="r" indent="0" marL="0">
+            <a:pPr marL="0" indent="0" algn="r">
               <a:buNone/>
             </a:pPr>
             <a:r>
@@ -15568,7 +15377,7 @@
           </a:solidFill>
           <a:ln/>
           <a:effectLst>
-            <a:outerShdw sx="100000" sy="100000" kx="0" ky="0" algn="bl" rotWithShape="0" blurRad="101600" dist="38100" dir="5400000">
+            <a:outerShdw blurRad="101600" dist="38100" dir="5400000" algn="bl" rotWithShape="0">
               <a:srgbClr val="0A1626">
                 <a:alpha val="10000"/>
               </a:srgbClr>
@@ -15617,7 +15426,7 @@
           <a:bodyPr wrap="square" lIns="0" tIns="0" rIns="0" bIns="0" rtlCol="0" anchor="ctr"/>
           <a:lstStyle/>
           <a:p>
-            <a:pPr indent="0" marL="0">
+            <a:pPr marL="0" indent="0">
               <a:buNone/>
             </a:pPr>
             <a:r>
@@ -15656,7 +15465,7 @@
           <a:bodyPr wrap="square" lIns="0" tIns="0" rIns="0" bIns="0" rtlCol="0" anchor="ctr"/>
           <a:lstStyle/>
           <a:p>
-            <a:pPr algn="r" indent="0" marL="0">
+            <a:pPr marL="0" indent="0" algn="r">
               <a:buNone/>
             </a:pPr>
             <a:r>
@@ -15695,7 +15504,7 @@
           </a:solidFill>
           <a:ln/>
           <a:effectLst>
-            <a:outerShdw sx="100000" sy="100000" kx="0" ky="0" algn="bl" rotWithShape="0" blurRad="101600" dist="38100" dir="5400000">
+            <a:outerShdw blurRad="101600" dist="38100" dir="5400000" algn="bl" rotWithShape="0">
               <a:srgbClr val="0A1626">
                 <a:alpha val="10000"/>
               </a:srgbClr>
@@ -15744,7 +15553,7 @@
           <a:bodyPr wrap="square" lIns="0" tIns="0" rIns="0" bIns="0" rtlCol="0" anchor="ctr"/>
           <a:lstStyle/>
           <a:p>
-            <a:pPr indent="0" marL="0">
+            <a:pPr marL="0" indent="0">
               <a:buNone/>
             </a:pPr>
             <a:r>
@@ -15783,7 +15592,7 @@
           <a:bodyPr wrap="square" lIns="0" tIns="0" rIns="0" bIns="0" rtlCol="0" anchor="ctr"/>
           <a:lstStyle/>
           <a:p>
-            <a:pPr algn="r" indent="0" marL="0">
+            <a:pPr marL="0" indent="0" algn="r">
               <a:buNone/>
             </a:pPr>
             <a:r>
@@ -15822,7 +15631,7 @@
           <a:bodyPr wrap="square" lIns="0" tIns="0" rIns="0" bIns="0" rtlCol="0" anchor="ctr"/>
           <a:lstStyle/>
           <a:p>
-            <a:pPr indent="0" marL="0">
+            <a:pPr marL="0" indent="0">
               <a:buNone/>
             </a:pPr>
             <a:r>
@@ -15836,9 +15645,6 @@
               </a:rPr>
               <a:t>SeaWatch</a:t>
             </a:r>
-            <a:pPr indent="0" marL="0">
-              <a:buNone/>
-            </a:pPr>
             <a:r>
               <a:rPr lang="en-US" sz="900" dirty="0">
                 <a:solidFill>
@@ -15875,7 +15681,7 @@
           <a:bodyPr wrap="square" rtlCol="0" anchor="ctr"/>
           <a:lstStyle/>
           <a:p>
-            <a:pPr algn="r" indent="0" marL="0">
+            <a:pPr marL="0" indent="0" algn="r">
               <a:buNone/>
             </a:pPr>
             <a:r>
@@ -15909,6 +15715,7 @@
         <a:solidFill>
           <a:srgbClr val="FFFFFF"/>
         </a:solidFill>
+        <a:effectLst/>
       </p:bgPr>
     </p:bg>
     <p:spTree>
@@ -15946,11 +15753,11 @@
           <a:bodyPr wrap="square" lIns="0" tIns="0" rIns="0" bIns="0" rtlCol="0" anchor="ctr"/>
           <a:lstStyle/>
           <a:p>
-            <a:pPr indent="0" marL="0">
-              <a:buNone/>
-            </a:pPr>
-            <a:r>
-              <a:rPr lang="en-US" sz="1250" b="1" spc="200" kern="0" dirty="0">
+            <a:pPr marL="0" indent="0">
+              <a:buNone/>
+            </a:pPr>
+            <a:r>
+              <a:rPr lang="en-US" sz="1250" b="1" kern="0" spc="200" dirty="0">
                 <a:solidFill>
                   <a:srgbClr val="0B7A3B"/>
                 </a:solidFill>
@@ -15985,7 +15792,7 @@
           <a:bodyPr wrap="square" lIns="0" tIns="0" rIns="0" bIns="0" rtlCol="0" anchor="ctr"/>
           <a:lstStyle/>
           <a:p>
-            <a:pPr indent="0" marL="0">
+            <a:pPr marL="0" indent="0">
               <a:buNone/>
             </a:pPr>
             <a:r>
@@ -16024,7 +15831,7 @@
           <a:bodyPr wrap="square" lIns="0" tIns="0" rIns="0" bIns="0" rtlCol="0" anchor="ctr"/>
           <a:lstStyle/>
           <a:p>
-            <a:pPr indent="0" marL="0">
+            <a:pPr marL="0" indent="0">
               <a:buNone/>
             </a:pPr>
             <a:r>
@@ -16063,11 +15870,11 @@
           <a:bodyPr wrap="square" lIns="0" tIns="0" rIns="0" bIns="0" rtlCol="0" anchor="ctr"/>
           <a:lstStyle/>
           <a:p>
-            <a:pPr indent="0" marL="0">
-              <a:buNone/>
-            </a:pPr>
-            <a:r>
-              <a:rPr lang="en-US" sz="1150" b="1" spc="100" kern="0" dirty="0">
+            <a:pPr marL="0" indent="0">
+              <a:buNone/>
+            </a:pPr>
+            <a:r>
+              <a:rPr lang="en-US" sz="1150" b="1" kern="0" spc="100" dirty="0">
                 <a:solidFill>
                   <a:srgbClr val="5C6E82"/>
                 </a:solidFill>
@@ -16102,7 +15909,7 @@
           </a:solidFill>
           <a:ln/>
           <a:effectLst>
-            <a:outerShdw sx="100000" sy="100000" kx="0" ky="0" algn="bl" rotWithShape="0" blurRad="101600" dist="38100" dir="5400000">
+            <a:outerShdw blurRad="101600" dist="38100" dir="5400000" algn="bl" rotWithShape="0">
               <a:srgbClr val="0A1626">
                 <a:alpha val="10000"/>
               </a:srgbClr>
@@ -16151,7 +15958,7 @@
           <a:bodyPr wrap="square" lIns="0" tIns="0" rIns="0" bIns="0" rtlCol="0" anchor="ctr"/>
           <a:lstStyle/>
           <a:p>
-            <a:pPr indent="0" marL="0">
+            <a:pPr marL="0" indent="0">
               <a:buNone/>
             </a:pPr>
             <a:r>
@@ -16190,7 +15997,7 @@
           </a:solidFill>
           <a:ln/>
           <a:effectLst>
-            <a:outerShdw sx="100000" sy="100000" kx="0" ky="0" algn="bl" rotWithShape="0" blurRad="101600" dist="38100" dir="5400000">
+            <a:outerShdw blurRad="101600" dist="38100" dir="5400000" algn="bl" rotWithShape="0">
               <a:srgbClr val="0A1626">
                 <a:alpha val="10000"/>
               </a:srgbClr>
@@ -16239,7 +16046,7 @@
           <a:bodyPr wrap="square" lIns="0" tIns="0" rIns="0" bIns="0" rtlCol="0" anchor="ctr"/>
           <a:lstStyle/>
           <a:p>
-            <a:pPr indent="0" marL="0">
+            <a:pPr marL="0" indent="0">
               <a:buNone/>
             </a:pPr>
             <a:r>
@@ -16278,7 +16085,7 @@
           </a:solidFill>
           <a:ln/>
           <a:effectLst>
-            <a:outerShdw sx="100000" sy="100000" kx="0" ky="0" algn="bl" rotWithShape="0" blurRad="101600" dist="38100" dir="5400000">
+            <a:outerShdw blurRad="101600" dist="38100" dir="5400000" algn="bl" rotWithShape="0">
               <a:srgbClr val="0A1626">
                 <a:alpha val="10000"/>
               </a:srgbClr>
@@ -16327,7 +16134,7 @@
           <a:bodyPr wrap="square" lIns="0" tIns="0" rIns="0" bIns="0" rtlCol="0" anchor="ctr"/>
           <a:lstStyle/>
           <a:p>
-            <a:pPr indent="0" marL="0">
+            <a:pPr marL="0" indent="0">
               <a:buNone/>
             </a:pPr>
             <a:r>
@@ -16366,7 +16173,7 @@
           </a:solidFill>
           <a:ln/>
           <a:effectLst>
-            <a:outerShdw sx="100000" sy="100000" kx="0" ky="0" algn="bl" rotWithShape="0" blurRad="101600" dist="38100" dir="5400000">
+            <a:outerShdw blurRad="101600" dist="38100" dir="5400000" algn="bl" rotWithShape="0">
               <a:srgbClr val="0A1626">
                 <a:alpha val="10000"/>
               </a:srgbClr>
@@ -16415,7 +16222,7 @@
           <a:bodyPr wrap="square" lIns="0" tIns="0" rIns="0" bIns="0" rtlCol="0" anchor="ctr"/>
           <a:lstStyle/>
           <a:p>
-            <a:pPr indent="0" marL="0">
+            <a:pPr marL="0" indent="0">
               <a:buNone/>
             </a:pPr>
             <a:r>
@@ -16454,7 +16261,7 @@
           </a:solidFill>
           <a:ln/>
           <a:effectLst>
-            <a:outerShdw sx="100000" sy="100000" kx="0" ky="0" algn="bl" rotWithShape="0" blurRad="101600" dist="38100" dir="5400000">
+            <a:outerShdw blurRad="101600" dist="38100" dir="5400000" algn="bl" rotWithShape="0">
               <a:srgbClr val="0A1626">
                 <a:alpha val="10000"/>
               </a:srgbClr>
@@ -16503,7 +16310,7 @@
           <a:bodyPr wrap="square" lIns="0" tIns="0" rIns="0" bIns="0" rtlCol="0" anchor="ctr"/>
           <a:lstStyle/>
           <a:p>
-            <a:pPr indent="0" marL="0">
+            <a:pPr marL="0" indent="0">
               <a:buNone/>
             </a:pPr>
             <a:r>
@@ -16542,7 +16349,7 @@
           </a:solidFill>
           <a:ln/>
           <a:effectLst>
-            <a:outerShdw sx="100000" sy="100000" kx="0" ky="0" algn="bl" rotWithShape="0" blurRad="101600" dist="38100" dir="5400000">
+            <a:outerShdw blurRad="101600" dist="38100" dir="5400000" algn="bl" rotWithShape="0">
               <a:srgbClr val="0A1626">
                 <a:alpha val="10000"/>
               </a:srgbClr>
@@ -16591,7 +16398,7 @@
           <a:bodyPr wrap="square" lIns="0" tIns="0" rIns="0" bIns="0" rtlCol="0" anchor="ctr"/>
           <a:lstStyle/>
           <a:p>
-            <a:pPr indent="0" marL="0">
+            <a:pPr marL="0" indent="0">
               <a:buNone/>
             </a:pPr>
             <a:r>
@@ -16630,7 +16437,7 @@
           </a:solidFill>
           <a:ln/>
           <a:effectLst>
-            <a:outerShdw sx="100000" sy="100000" kx="0" ky="0" algn="bl" rotWithShape="0" blurRad="101600" dist="38100" dir="5400000">
+            <a:outerShdw blurRad="101600" dist="38100" dir="5400000" algn="bl" rotWithShape="0">
               <a:srgbClr val="0A1626">
                 <a:alpha val="10000"/>
               </a:srgbClr>
@@ -16679,7 +16486,7 @@
           <a:bodyPr wrap="square" lIns="0" tIns="0" rIns="0" bIns="0" rtlCol="0" anchor="ctr"/>
           <a:lstStyle/>
           <a:p>
-            <a:pPr indent="0" marL="0">
+            <a:pPr marL="0" indent="0">
               <a:buNone/>
             </a:pPr>
             <a:r>
@@ -16718,7 +16525,7 @@
           </a:solidFill>
           <a:ln/>
           <a:effectLst>
-            <a:outerShdw sx="100000" sy="100000" kx="0" ky="0" algn="bl" rotWithShape="0" blurRad="101600" dist="38100" dir="5400000">
+            <a:outerShdw blurRad="101600" dist="38100" dir="5400000" algn="bl" rotWithShape="0">
               <a:srgbClr val="0A1626">
                 <a:alpha val="10000"/>
               </a:srgbClr>
@@ -16767,7 +16574,7 @@
           <a:bodyPr wrap="square" lIns="0" tIns="0" rIns="0" bIns="0" rtlCol="0" anchor="ctr"/>
           <a:lstStyle/>
           <a:p>
-            <a:pPr indent="0" marL="0">
+            <a:pPr marL="0" indent="0">
               <a:buNone/>
             </a:pPr>
             <a:r>
@@ -16806,7 +16613,7 @@
           </a:solidFill>
           <a:ln/>
           <a:effectLst>
-            <a:outerShdw sx="100000" sy="100000" kx="0" ky="0" algn="bl" rotWithShape="0" blurRad="101600" dist="38100" dir="5400000">
+            <a:outerShdw blurRad="101600" dist="38100" dir="5400000" algn="bl" rotWithShape="0">
               <a:srgbClr val="0A1626">
                 <a:alpha val="10000"/>
               </a:srgbClr>
@@ -16855,7 +16662,7 @@
           <a:bodyPr wrap="square" lIns="0" tIns="0" rIns="0" bIns="0" rtlCol="0" anchor="ctr"/>
           <a:lstStyle/>
           <a:p>
-            <a:pPr indent="0" marL="0">
+            <a:pPr marL="0" indent="0">
               <a:buNone/>
             </a:pPr>
             <a:r>
@@ -16894,7 +16701,7 @@
           </a:solidFill>
           <a:ln/>
           <a:effectLst>
-            <a:outerShdw sx="100000" sy="100000" kx="0" ky="0" algn="bl" rotWithShape="0" blurRad="101600" dist="38100" dir="5400000">
+            <a:outerShdw blurRad="101600" dist="38100" dir="5400000" algn="bl" rotWithShape="0">
               <a:srgbClr val="0A1626">
                 <a:alpha val="10000"/>
               </a:srgbClr>
@@ -16923,7 +16730,7 @@
           <a:bodyPr wrap="square" lIns="0" tIns="0" rIns="0" bIns="0" rtlCol="0" anchor="ctr"/>
           <a:lstStyle/>
           <a:p>
-            <a:pPr indent="0" marL="0">
+            <a:pPr marL="0" indent="0">
               <a:buNone/>
             </a:pPr>
             <a:r>
@@ -16962,7 +16769,7 @@
           <a:bodyPr wrap="square" lIns="0" tIns="0" rIns="0" bIns="0" rtlCol="0" anchor="t"/>
           <a:lstStyle/>
           <a:p>
-            <a:pPr indent="0" marL="0">
+            <a:pPr marL="0" indent="0">
               <a:buNone/>
             </a:pPr>
             <a:r>
@@ -17001,7 +16808,7 @@
           </a:solidFill>
           <a:ln/>
           <a:effectLst>
-            <a:outerShdw sx="100000" sy="100000" kx="0" ky="0" algn="bl" rotWithShape="0" blurRad="101600" dist="38100" dir="5400000">
+            <a:outerShdw blurRad="101600" dist="38100" dir="5400000" algn="bl" rotWithShape="0">
               <a:srgbClr val="0A1626">
                 <a:alpha val="10000"/>
               </a:srgbClr>
@@ -17030,7 +16837,7 @@
           <a:bodyPr wrap="square" lIns="0" tIns="0" rIns="0" bIns="0" rtlCol="0" anchor="ctr"/>
           <a:lstStyle/>
           <a:p>
-            <a:pPr indent="0" marL="0">
+            <a:pPr marL="0" indent="0">
               <a:buNone/>
             </a:pPr>
             <a:r>
@@ -17069,7 +16876,7 @@
           <a:bodyPr wrap="square" lIns="0" tIns="0" rIns="0" bIns="0" rtlCol="0" anchor="t"/>
           <a:lstStyle/>
           <a:p>
-            <a:pPr indent="0" marL="0">
+            <a:pPr marL="0" indent="0">
               <a:buNone/>
             </a:pPr>
             <a:r>
@@ -17108,7 +16915,7 @@
           </a:solidFill>
           <a:ln/>
           <a:effectLst>
-            <a:outerShdw sx="100000" sy="100000" kx="0" ky="0" algn="bl" rotWithShape="0" blurRad="101600" dist="38100" dir="5400000">
+            <a:outerShdw blurRad="101600" dist="38100" dir="5400000" algn="bl" rotWithShape="0">
               <a:srgbClr val="0A1626">
                 <a:alpha val="10000"/>
               </a:srgbClr>
@@ -17137,7 +16944,7 @@
           <a:bodyPr wrap="square" lIns="0" tIns="0" rIns="0" bIns="0" rtlCol="0" anchor="ctr"/>
           <a:lstStyle/>
           <a:p>
-            <a:pPr indent="0" marL="0">
+            <a:pPr marL="0" indent="0">
               <a:buNone/>
             </a:pPr>
             <a:r>
@@ -17176,7 +16983,7 @@
           <a:bodyPr wrap="square" lIns="0" tIns="0" rIns="0" bIns="0" rtlCol="0" anchor="t"/>
           <a:lstStyle/>
           <a:p>
-            <a:pPr indent="0" marL="0">
+            <a:pPr marL="0" indent="0">
               <a:buNone/>
             </a:pPr>
             <a:r>
@@ -17215,7 +17022,7 @@
           <a:bodyPr wrap="square" lIns="0" tIns="0" rIns="0" bIns="0" rtlCol="0" anchor="ctr"/>
           <a:lstStyle/>
           <a:p>
-            <a:pPr indent="0" marL="0">
+            <a:pPr marL="0" indent="0">
               <a:buNone/>
             </a:pPr>
             <a:r>
@@ -17229,9 +17036,6 @@
               </a:rPr>
               <a:t>SeaWatch</a:t>
             </a:r>
-            <a:pPr indent="0" marL="0">
-              <a:buNone/>
-            </a:pPr>
             <a:r>
               <a:rPr lang="en-US" sz="900" dirty="0">
                 <a:solidFill>
@@ -17268,7 +17072,7 @@
           <a:bodyPr wrap="square" rtlCol="0" anchor="ctr"/>
           <a:lstStyle/>
           <a:p>
-            <a:pPr algn="r" indent="0" marL="0">
+            <a:pPr marL="0" indent="0" algn="r">
               <a:buNone/>
             </a:pPr>
             <a:r>
@@ -17587,4 +17391,265 @@
     </a:ext>
   </a:extLst>
 </a:theme>
+</file>
+
+<file path=ppt/theme/theme2.xml><?xml version="1.0" encoding="utf-8"?>
+<a:theme xmlns:a="http://schemas.openxmlformats.org/drawingml/2006/main" name="Office Theme">
+  <a:themeElements>
+    <a:clrScheme name="Office">
+      <a:dk1>
+        <a:sysClr val="windowText" lastClr="000000"/>
+      </a:dk1>
+      <a:lt1>
+        <a:sysClr val="window" lastClr="FFFFFF"/>
+      </a:lt1>
+      <a:dk2>
+        <a:srgbClr val="44546A"/>
+      </a:dk2>
+      <a:lt2>
+        <a:srgbClr val="E7E6E6"/>
+      </a:lt2>
+      <a:accent1>
+        <a:srgbClr val="5B9BD5"/>
+      </a:accent1>
+      <a:accent2>
+        <a:srgbClr val="ED7D31"/>
+      </a:accent2>
+      <a:accent3>
+        <a:srgbClr val="A5A5A5"/>
+      </a:accent3>
+      <a:accent4>
+        <a:srgbClr val="FFC000"/>
+      </a:accent4>
+      <a:accent5>
+        <a:srgbClr val="4472C4"/>
+      </a:accent5>
+      <a:accent6>
+        <a:srgbClr val="70AD47"/>
+      </a:accent6>
+      <a:hlink>
+        <a:srgbClr val="0563C1"/>
+      </a:hlink>
+      <a:folHlink>
+        <a:srgbClr val="954F72"/>
+      </a:folHlink>
+    </a:clrScheme>
+    <a:fontScheme name="Office">
+      <a:majorFont>
+        <a:latin typeface="Calibri Light" panose="020F0302020204030204"/>
+        <a:ea typeface=""/>
+        <a:cs typeface=""/>
+        <a:font script="Jpan" typeface="游ゴシック Light"/>
+        <a:font script="Hang" typeface="맑은 고딕"/>
+        <a:font script="Hans" typeface="等线 Light"/>
+        <a:font script="Hant" typeface="新細明體"/>
+        <a:font script="Arab" typeface="Times New Roman"/>
+        <a:font script="Hebr" typeface="Times New Roman"/>
+        <a:font script="Thai" typeface="Angsana New"/>
+        <a:font script="Ethi" typeface="Nyala"/>
+        <a:font script="Beng" typeface="Vrinda"/>
+        <a:font script="Gujr" typeface="Shruti"/>
+        <a:font script="Khmr" typeface="MoolBoran"/>
+        <a:font script="Knda" typeface="Tunga"/>
+        <a:font script="Guru" typeface="Raavi"/>
+        <a:font script="Cans" typeface="Euphemia"/>
+        <a:font script="Cher" typeface="Plantagenet Cherokee"/>
+        <a:font script="Yiii" typeface="Microsoft Yi Baiti"/>
+        <a:font script="Tibt" typeface="Microsoft Himalaya"/>
+        <a:font script="Thaa" typeface="MV Boli"/>
+        <a:font script="Deva" typeface="Mangal"/>
+        <a:font script="Telu" typeface="Gautami"/>
+        <a:font script="Taml" typeface="Latha"/>
+        <a:font script="Syrc" typeface="Estrangelo Edessa"/>
+        <a:font script="Orya" typeface="Kalinga"/>
+        <a:font script="Mlym" typeface="Kartika"/>
+        <a:font script="Laoo" typeface="DokChampa"/>
+        <a:font script="Sinh" typeface="Iskoola Pota"/>
+        <a:font script="Mong" typeface="Mongolian Baiti"/>
+        <a:font script="Viet" typeface="Times New Roman"/>
+        <a:font script="Uigh" typeface="Microsoft Uighur"/>
+        <a:font script="Geor" typeface="Sylfaen"/>
+      </a:majorFont>
+      <a:minorFont>
+        <a:latin typeface="Calibri" panose="020F0502020204030204"/>
+        <a:ea typeface=""/>
+        <a:cs typeface=""/>
+        <a:font script="Jpan" typeface="游ゴシック"/>
+        <a:font script="Hang" typeface="맑은 고딕"/>
+        <a:font script="Hans" typeface="等线"/>
+        <a:font script="Hant" typeface="新細明體"/>
+        <a:font script="Arab" typeface="Arial"/>
+        <a:font script="Hebr" typeface="Arial"/>
+        <a:font script="Thai" typeface="Cordia New"/>
+        <a:font script="Ethi" typeface="Nyala"/>
+        <a:font script="Beng" typeface="Vrinda"/>
+        <a:font script="Gujr" typeface="Shruti"/>
+        <a:font script="Khmr" typeface="DaunPenh"/>
+        <a:font script="Knda" typeface="Tunga"/>
+        <a:font script="Guru" typeface="Raavi"/>
+        <a:font script="Cans" typeface="Euphemia"/>
+        <a:font script="Cher" typeface="Plantagenet Cherokee"/>
+        <a:font script="Yiii" typeface="Microsoft Yi Baiti"/>
+        <a:font script="Tibt" typeface="Microsoft Himalaya"/>
+        <a:font script="Thaa" typeface="MV Boli"/>
+        <a:font script="Deva" typeface="Mangal"/>
+        <a:font script="Telu" typeface="Gautami"/>
+        <a:font script="Taml" typeface="Latha"/>
+        <a:font script="Syrc" typeface="Estrangelo Edessa"/>
+        <a:font script="Orya" typeface="Kalinga"/>
+        <a:font script="Mlym" typeface="Kartika"/>
+        <a:font script="Laoo" typeface="DokChampa"/>
+        <a:font script="Sinh" typeface="Iskoola Pota"/>
+        <a:font script="Mong" typeface="Mongolian Baiti"/>
+        <a:font script="Viet" typeface="Arial"/>
+        <a:font script="Uigh" typeface="Microsoft Uighur"/>
+        <a:font script="Geor" typeface="Sylfaen"/>
+      </a:minorFont>
+    </a:fontScheme>
+    <a:fmtScheme name="Office">
+      <a:fillStyleLst>
+        <a:solidFill>
+          <a:schemeClr val="phClr"/>
+        </a:solidFill>
+        <a:gradFill rotWithShape="1">
+          <a:gsLst>
+            <a:gs pos="0">
+              <a:schemeClr val="phClr">
+                <a:lumMod val="110000"/>
+                <a:satMod val="105000"/>
+                <a:tint val="67000"/>
+              </a:schemeClr>
+            </a:gs>
+            <a:gs pos="50000">
+              <a:schemeClr val="phClr">
+                <a:lumMod val="105000"/>
+                <a:satMod val="103000"/>
+                <a:tint val="73000"/>
+              </a:schemeClr>
+            </a:gs>
+            <a:gs pos="100000">
+              <a:schemeClr val="phClr">
+                <a:lumMod val="105000"/>
+                <a:satMod val="109000"/>
+                <a:tint val="81000"/>
+              </a:schemeClr>
+            </a:gs>
+          </a:gsLst>
+          <a:lin ang="5400000" scaled="0"/>
+        </a:gradFill>
+        <a:gradFill rotWithShape="1">
+          <a:gsLst>
+            <a:gs pos="0">
+              <a:schemeClr val="phClr">
+                <a:satMod val="103000"/>
+                <a:lumMod val="102000"/>
+                <a:tint val="94000"/>
+              </a:schemeClr>
+            </a:gs>
+            <a:gs pos="50000">
+              <a:schemeClr val="phClr">
+                <a:satMod val="110000"/>
+                <a:lumMod val="100000"/>
+                <a:shade val="100000"/>
+              </a:schemeClr>
+            </a:gs>
+            <a:gs pos="100000">
+              <a:schemeClr val="phClr">
+                <a:lumMod val="99000"/>
+                <a:satMod val="120000"/>
+                <a:shade val="78000"/>
+              </a:schemeClr>
+            </a:gs>
+          </a:gsLst>
+          <a:lin ang="5400000" scaled="0"/>
+        </a:gradFill>
+      </a:fillStyleLst>
+      <a:lnStyleLst>
+        <a:ln w="6350" cap="flat" cmpd="sng" algn="ctr">
+          <a:solidFill>
+            <a:schemeClr val="phClr"/>
+          </a:solidFill>
+          <a:prstDash val="solid"/>
+          <a:miter lim="800000"/>
+        </a:ln>
+        <a:ln w="12700" cap="flat" cmpd="sng" algn="ctr">
+          <a:solidFill>
+            <a:schemeClr val="phClr"/>
+          </a:solidFill>
+          <a:prstDash val="solid"/>
+          <a:miter lim="800000"/>
+        </a:ln>
+        <a:ln w="19050" cap="flat" cmpd="sng" algn="ctr">
+          <a:solidFill>
+            <a:schemeClr val="phClr"/>
+          </a:solidFill>
+          <a:prstDash val="solid"/>
+          <a:miter lim="800000"/>
+        </a:ln>
+      </a:lnStyleLst>
+      <a:effectStyleLst>
+        <a:effectStyle>
+          <a:effectLst/>
+        </a:effectStyle>
+        <a:effectStyle>
+          <a:effectLst/>
+        </a:effectStyle>
+        <a:effectStyle>
+          <a:effectLst>
+            <a:outerShdw blurRad="57150" dist="19050" dir="5400000" algn="ctr" rotWithShape="0">
+              <a:srgbClr val="000000">
+                <a:alpha val="63000"/>
+              </a:srgbClr>
+            </a:outerShdw>
+          </a:effectLst>
+        </a:effectStyle>
+      </a:effectStyleLst>
+      <a:bgFillStyleLst>
+        <a:solidFill>
+          <a:schemeClr val="phClr"/>
+        </a:solidFill>
+        <a:solidFill>
+          <a:schemeClr val="phClr">
+            <a:tint val="95000"/>
+            <a:satMod val="170000"/>
+          </a:schemeClr>
+        </a:solidFill>
+        <a:gradFill rotWithShape="1">
+          <a:gsLst>
+            <a:gs pos="0">
+              <a:schemeClr val="phClr">
+                <a:tint val="93000"/>
+                <a:satMod val="150000"/>
+                <a:shade val="98000"/>
+                <a:lumMod val="102000"/>
+              </a:schemeClr>
+            </a:gs>
+            <a:gs pos="50000">
+              <a:schemeClr val="phClr">
+                <a:tint val="98000"/>
+                <a:satMod val="130000"/>
+                <a:shade val="90000"/>
+                <a:lumMod val="103000"/>
+              </a:schemeClr>
+            </a:gs>
+            <a:gs pos="100000">
+              <a:schemeClr val="phClr">
+                <a:shade val="63000"/>
+                <a:satMod val="120000"/>
+              </a:schemeClr>
+            </a:gs>
+          </a:gsLst>
+          <a:lin ang="5400000" scaled="0"/>
+        </a:gradFill>
+      </a:bgFillStyleLst>
+    </a:fmtScheme>
+  </a:themeElements>
+  <a:objectDefaults/>
+  <a:extraClrSchemeLst/>
+  <a:extLst>
+    <a:ext uri="{05A4C25C-085E-4340-85A3-A5531E510DB2}">
+      <thm15:themeFamily xmlns:thm15="http://schemas.microsoft.com/office/thememl/2012/main" name="Office Theme" id="{62F939B6-93AF-4DB8-9C6B-D6C7DFDC589F}" vid="{4A3C46E8-61CC-4603-A589-7422A47A8E4A}"/>
+    </a:ext>
+  </a:extLst>
+</a:theme>
 </file>
--- a/SeaWatch-Capabilities-Brief.pptx
+++ b/SeaWatch-Capabilities-Brief.pptx
@@ -15223,7 +15223,18 @@
                 <a:ea typeface="Cambria" pitchFamily="34" charset="-122"/>
                 <a:cs typeface="Cambria" pitchFamily="34" charset="-120"/>
               </a:rPr>
-              <a:t>70 – 100</a:t>
+              <a:t>70 </a:t>
+            </a:r>
+            <a:r>
+              <a:rPr lang="en-US" sz="1400" b="1" dirty="0" smtClean="0">
+                <a:solidFill>
+                  <a:srgbClr val="C8102E"/>
+                </a:solidFill>
+                <a:latin typeface="Cambria" pitchFamily="34" charset="0"/>
+                <a:ea typeface="Cambria" pitchFamily="34" charset="-122"/>
+                <a:cs typeface="Cambria" pitchFamily="34" charset="-120"/>
+              </a:rPr>
+              <a:t>+</a:t>
             </a:r>
             <a:endParaRPr lang="en-US" sz="1400" dirty="0"/>
           </a:p>
